--- a/03-Python程序设计-项目实战/V2授课PPT/W02-第3次课-像企业团队一样写代码.pptx
+++ b/03-Python程序设计-项目实战/V2授课PPT/W02-第3次课-像企业团队一样写代码.pptx
@@ -9166,7 +9166,7 @@
                 </a:solidFill>
                 <a:latin typeface="微软雅黑"/>
               </a:rPr>
-              <a:t>目标：掌握PEP 8规范要点；掌握venv虚拟环境与requirements.txt依赖管理；掌握Git基本工作流与项</a:t>
+              <a:t>目标：掌握PEP 8规范要点；掌握conda环境与requirements.txt依赖管理；掌握Git基本工作流与项</a:t>
             </a:r>
           </a:p>
         </p:txBody>
@@ -11261,7 +11261,7 @@
                 </a:solidFill>
                 <a:latin typeface="微软雅黑"/>
               </a:rPr>
-              <a:t>requirements.txt的作用？venv为什么必须.gitignore？</a:t>
+              <a:t>requirements.txt的作用？conda环境为什么不必进.gitignore？</a:t>
             </a:r>
           </a:p>
         </p:txBody>
@@ -12841,7 +12841,7 @@
                 </a:solidFill>
                 <a:latin typeface="微软雅黑"/>
               </a:rPr>
-              <a:t>题目：requirements.txt的作用？venv为什么必须.gitignore？</a:t>
+              <a:t>题目：requirements.txt的作用？conda环境为什么不必进.gitignore？</a:t>
             </a:r>
           </a:p>
         </p:txBody>
@@ -13549,7 +13549,7 @@
                 </a:solidFill>
                 <a:latin typeface="微软雅黑"/>
               </a:rPr>
-              <a:t>进组第一件事不是写代码。方总监下令：全组统一工程底座，'以后所有代码都长在这个模板上。'——工单P1.2：交付标准工程模板（venv+Git+目录规范），模板即资产。</a:t>
+              <a:t>进组第一件事不是写代码。方总监下令：全组统一工程底座，'以后所有代码都长在这个模板上。'——工单P1.2：交付标准工程模板（conda环境+Git+目录规范），模板即资产。</a:t>
             </a:r>
           </a:p>
         </p:txBody>
@@ -14729,7 +14729,7 @@
                 </a:solidFill>
                 <a:latin typeface="微软雅黑"/>
               </a:rPr>
-              <a:t>掌握PEP 8规范要点；掌握venv虚拟环境与requirements.txt依赖管理；掌握Git基本工作流与项</a:t>
+              <a:t>掌握PEP 8规范要点；掌握conda环境与requirements.txt依赖管理；掌握Git基本工作流与项</a:t>
             </a:r>
           </a:p>
         </p:txBody>
@@ -19080,7 +19080,7 @@
                 </a:solidFill>
                 <a:latin typeface="微软雅黑"/>
               </a:rPr>
-              <a:t>知识详解：venv/conda沙箱</a:t>
+              <a:t>知识详解：conda环境沙箱</a:t>
             </a:r>
           </a:p>
         </p:txBody>
@@ -19166,7 +19166,7 @@
                 </a:solidFill>
                 <a:latin typeface="微软雅黑"/>
               </a:rPr>
-              <a:t>B02 · venv/conda沙箱</a:t>
+              <a:t>B02 · conda环境沙箱</a:t>
             </a:r>
           </a:p>
         </p:txBody>
@@ -19340,7 +19340,7 @@
                 </a:solidFill>
                 <a:latin typeface="微软雅黑"/>
               </a:rPr>
-              <a:t>虚拟环境=每台机器各配工具箱：A要库1.0、B要2.0互不打架</a:t>
+              <a:t>conda环境=每台机器各配工具箱：A要库1.0、B要2.0互不打架</a:t>
             </a:r>
           </a:p>
         </p:txBody>
@@ -27217,7 +27217,7 @@
                 </a:solidFill>
                 <a:latin typeface="微软雅黑"/>
               </a:rPr>
-              <a:t>虚拟环境（venv）与依赖管理（requirements.txt）；</a:t>
+              <a:t>conda环境与依赖管理（requirements.txt）；</a:t>
             </a:r>
           </a:p>
         </p:txBody>
@@ -31267,7 +31267,7 @@
                 </a:solidFill>
                 <a:latin typeface="微软雅黑"/>
               </a:rPr>
-              <a:t>2. venv+requirements+首次规范commit</a:t>
+              <a:t>2. conda环境+requirements+首次规范commit</a:t>
             </a:r>
           </a:p>
           <a:p>
@@ -31393,7 +31393,7 @@
                 </a:solidFill>
                 <a:latin typeface="微软雅黑"/>
               </a:rPr>
-              <a:t>venv可用+仓库+结构完整</a:t>
+              <a:t>conda环境可用+仓库+结构完整</a:t>
             </a:r>
           </a:p>
         </p:txBody>
@@ -36791,7 +36791,7 @@
                 </a:solidFill>
                 <a:latin typeface="微软雅黑"/>
               </a:rPr>
-              <a:t>venv+requirements+首次规范commit</a:t>
+              <a:t>conda环境+requirements+首次规范commit</a:t>
             </a:r>
           </a:p>
         </p:txBody>
@@ -37049,7 +37049,7 @@
                 </a:solidFill>
                 <a:latin typeface="微软雅黑"/>
               </a:rPr>
-              <a:t>1. venv/与__pycache__必须进.gitignore</a:t>
+              <a:t>1. __pycache__必须进.gitignore（conda环境在Anaconda目录，无需提交）</a:t>
             </a:r>
           </a:p>
           <a:p>
@@ -37495,7 +37495,7 @@
                 </a:solidFill>
                 <a:latin typeface="微软雅黑"/>
               </a:rPr>
-              <a:t>⚠ venv被提交</a:t>
+              <a:t>⚠ 环境目录被提交</a:t>
             </a:r>
           </a:p>
         </p:txBody>
@@ -37579,7 +37579,7 @@
                 </a:solidFill>
                 <a:latin typeface="微软雅黑"/>
               </a:rPr>
-              <a:t>✔ 解决: 加venv/与__pycache__/</a:t>
+              <a:t>✔ 解决: 加__pycache__/（conda环境在Anaconda目录）</a:t>
             </a:r>
           </a:p>
         </p:txBody>
@@ -37753,7 +37753,7 @@
                 </a:solidFill>
                 <a:latin typeface="微软雅黑"/>
               </a:rPr>
-              <a:t>原因: 没激活venv</a:t>
+              <a:t>原因: 没激活conda环境</a:t>
             </a:r>
           </a:p>
         </p:txBody>
@@ -37795,7 +37795,7 @@
                 </a:solidFill>
                 <a:latin typeface="微软雅黑"/>
               </a:rPr>
-              <a:t>✔ 解决: 看终端前缀(venv)</a:t>
+              <a:t>✔ 解决: 看终端前缀(环境名)</a:t>
             </a:r>
           </a:p>
         </p:txBody>
@@ -39337,7 +39337,7 @@
                 </a:solidFill>
                 <a:latin typeface="微软雅黑"/>
               </a:rPr>
-              <a:t>□ 步骤2：venv+requirements+首次规范commit</a:t>
+              <a:t>□ 步骤2：conda环境+requirements+首次规范commit</a:t>
             </a:r>
           </a:p>
         </p:txBody>
@@ -44513,7 +44513,7 @@
                 </a:solidFill>
                 <a:latin typeface="微软雅黑"/>
               </a:rPr>
-              <a:t>标准结构：src/tests/config/data/docs · venv沙箱隔离；requirements.txt冻结</a:t>
+              <a:t>标准结构：src/tests/config/data/docs · conda环境隔离；requirements.txt冻结</a:t>
             </a:r>
           </a:p>
         </p:txBody>
@@ -52972,7 +52972,7 @@
                 </a:solidFill>
                 <a:latin typeface="微软雅黑"/>
               </a:rPr>
-              <a:t>标准结构：src/tests/config/data/docs · venv沙箱隔离；requirements.txt冻结</a:t>
+              <a:t>标准结构：src/tests/config/data/docs · conda环境隔离；requirements.txt冻结</a:t>
             </a:r>
           </a:p>
         </p:txBody>
@@ -53390,7 +53390,7 @@
                 </a:solidFill>
                 <a:latin typeface="微软雅黑"/>
               </a:rPr>
-              <a:t>venv被提交 · 全局py环境混乱</a:t>
+              <a:t>环境目录被提交 · 全局py环境混乱</a:t>
             </a:r>
           </a:p>
         </p:txBody>
@@ -55021,7 +55021,7 @@
                 </a:solidFill>
                 <a:latin typeface="微软雅黑"/>
               </a:rPr>
-              <a:t>requirements.txt的作用？venv为什么必须.gitignore？</a:t>
+              <a:t>requirements.txt的作用？conda环境为什么不必进.gitignore？</a:t>
             </a:r>
           </a:p>
         </p:txBody>
@@ -55153,7 +55153,7 @@
                 </a:solidFill>
                 <a:latin typeface="微软雅黑"/>
               </a:rPr>
-              <a:t>排错题：出现「venv被提交」</a:t>
+              <a:t>排错题：出现「环境目录被提交」</a:t>
             </a:r>
           </a:p>
         </p:txBody>
@@ -55195,7 +55195,7 @@
                 </a:solidFill>
                 <a:latin typeface="微软雅黑"/>
               </a:rPr>
-              <a:t>原因：.gitignore缺；解决：加venv/与__pycache__/</a:t>
+              <a:t>原因：.gitignore缺；解决：加__pycache__/（conda环境在Anaconda目录）</a:t>
             </a:r>
           </a:p>
         </p:txBody>
@@ -56697,7 +56697,7 @@
                 </a:solidFill>
                 <a:latin typeface="微软雅黑"/>
               </a:rPr>
-              <a:t>知识：标准结构：src/tests/confi；venv沙箱隔离；requirement；Git五步：init/add/commi</a:t>
+              <a:t>知识：标准结构：src/tests/confi；conda环境隔离；requirement；Git五步：init/add/commi</a:t>
             </a:r>
           </a:p>
         </p:txBody>

--- a/03-Python程序设计-项目实战/V2授课PPT/W02-第3次课-像企业团队一样写代码.pptx
+++ b/03-Python程序设计-项目实战/V2授课PPT/W02-第3次课-像企业团队一样写代码.pptx
@@ -51,6 +51,9 @@
     <p:sldId id="329" r:id="rId81"/>
     <p:sldId id="331" r:id="rId83"/>
     <p:sldId id="332" r:id="rId84"/>
+    <p:sldId id="363" r:id="rId69"/>
+    <p:sldId id="364" r:id="rId71"/>
+    <p:sldId id="365" r:id="rId63"/>
     <p:sldId id="333" r:id="rId85"/>
     <p:sldId id="334" r:id="rId86"/>
     <p:sldId id="335" r:id="rId87"/>
@@ -8846,7 +8849,7 @@
                 </a:solidFill>
                 <a:latin typeface="微软雅黑"/>
               </a:rPr>
-              <a:t>10 / 62</a:t>
+              <a:t>10 / 65</a:t>
             </a:r>
           </a:p>
         </p:txBody>
@@ -9552,7 +9555,7 @@
                 </a:solidFill>
                 <a:latin typeface="微软雅黑"/>
               </a:rPr>
-              <a:t>11 / 62</a:t>
+              <a:t>11 / 65</a:t>
             </a:r>
           </a:p>
         </p:txBody>
@@ -10258,7 +10261,7 @@
                 </a:solidFill>
                 <a:latin typeface="微软雅黑"/>
               </a:rPr>
-              <a:t>12 / 62</a:t>
+              <a:t>12 / 65</a:t>
             </a:r>
           </a:p>
         </p:txBody>
@@ -10964,7 +10967,7 @@
                 </a:solidFill>
                 <a:latin typeface="微软雅黑"/>
               </a:rPr>
-              <a:t>13 / 62</a:t>
+              <a:t>13 / 65</a:t>
             </a:r>
           </a:p>
         </p:txBody>
@@ -11450,7 +11453,7 @@
                 </a:solidFill>
                 <a:latin typeface="微软雅黑"/>
               </a:rPr>
-              <a:t>14 / 62</a:t>
+              <a:t>14 / 65</a:t>
             </a:r>
           </a:p>
         </p:txBody>
@@ -12521,7 +12524,7 @@
                 </a:solidFill>
                 <a:latin typeface="微软雅黑"/>
               </a:rPr>
-              <a:t>15 / 62</a:t>
+              <a:t>15 / 65</a:t>
             </a:r>
           </a:p>
         </p:txBody>
@@ -13227,7 +13230,7 @@
                 </a:solidFill>
                 <a:latin typeface="微软雅黑"/>
               </a:rPr>
-              <a:t>16 / 62</a:t>
+              <a:t>16 / 65</a:t>
             </a:r>
           </a:p>
         </p:txBody>
@@ -13701,7 +13704,7 @@
                 </a:solidFill>
                 <a:latin typeface="微软雅黑"/>
               </a:rPr>
-              <a:t>17 / 62</a:t>
+              <a:t>17 / 65</a:t>
             </a:r>
           </a:p>
         </p:txBody>
@@ -14407,7 +14410,7 @@
                 </a:solidFill>
                 <a:latin typeface="微软雅黑"/>
               </a:rPr>
-              <a:t>18 / 62</a:t>
+              <a:t>18 / 65</a:t>
             </a:r>
           </a:p>
         </p:txBody>
@@ -15379,7 +15382,7 @@
                 </a:solidFill>
                 <a:latin typeface="微软雅黑"/>
               </a:rPr>
-              <a:t>19 / 62</a:t>
+              <a:t>19 / 65</a:t>
             </a:r>
           </a:p>
         </p:txBody>
@@ -17107,7 +17110,7 @@
                 </a:solidFill>
                 <a:latin typeface="微软雅黑"/>
               </a:rPr>
-              <a:t>2 / 62</a:t>
+              <a:t>2 / 65</a:t>
             </a:r>
           </a:p>
         </p:txBody>
@@ -17962,7 +17965,7 @@
                 </a:solidFill>
                 <a:latin typeface="微软雅黑"/>
               </a:rPr>
-              <a:t>20 / 62</a:t>
+              <a:t>20 / 65</a:t>
             </a:r>
           </a:p>
         </p:txBody>
@@ -18932,7 +18935,7 @@
                 </a:solidFill>
                 <a:latin typeface="微软雅黑"/>
               </a:rPr>
-              <a:t>21 / 62</a:t>
+              <a:t>21 / 65</a:t>
             </a:r>
           </a:p>
         </p:txBody>
@@ -19902,7 +19905,7 @@
                 </a:solidFill>
                 <a:latin typeface="微软雅黑"/>
               </a:rPr>
-              <a:t>22 / 62</a:t>
+              <a:t>22 / 65</a:t>
             </a:r>
           </a:p>
         </p:txBody>
@@ -20872,7 +20875,7 @@
                 </a:solidFill>
                 <a:latin typeface="微软雅黑"/>
               </a:rPr>
-              <a:t>23 / 62</a:t>
+              <a:t>23 / 65</a:t>
             </a:r>
           </a:p>
         </p:txBody>
@@ -21842,7 +21845,7 @@
                 </a:solidFill>
                 <a:latin typeface="微软雅黑"/>
               </a:rPr>
-              <a:t>24 / 62</a:t>
+              <a:t>24 / 65</a:t>
             </a:r>
           </a:p>
         </p:txBody>
@@ -22812,7 +22815,7 @@
                 </a:solidFill>
                 <a:latin typeface="微软雅黑"/>
               </a:rPr>
-              <a:t>25 / 62</a:t>
+              <a:t>25 / 65</a:t>
             </a:r>
           </a:p>
         </p:txBody>
@@ -23348,7 +23351,7 @@
                 </a:solidFill>
                 <a:latin typeface="微软雅黑"/>
               </a:rPr>
-              <a:t>26 / 62</a:t>
+              <a:t>26 / 65</a:t>
             </a:r>
           </a:p>
         </p:txBody>
@@ -24318,7 +24321,7 @@
                 </a:solidFill>
                 <a:latin typeface="微软雅黑"/>
               </a:rPr>
-              <a:t>27 / 62</a:t>
+              <a:t>27 / 65</a:t>
             </a:r>
           </a:p>
         </p:txBody>
@@ -24984,7 +24987,7 @@
                 </a:solidFill>
                 <a:latin typeface="微软雅黑"/>
               </a:rPr>
-              <a:t>28 / 62</a:t>
+              <a:t>28 / 65</a:t>
             </a:r>
           </a:p>
         </p:txBody>
@@ -25956,7 +25959,7 @@
                 </a:solidFill>
                 <a:latin typeface="微软雅黑"/>
               </a:rPr>
-              <a:t>29 / 62</a:t>
+              <a:t>29 / 65</a:t>
             </a:r>
           </a:p>
         </p:txBody>
@@ -26811,7 +26814,7 @@
                 </a:solidFill>
                 <a:latin typeface="微软雅黑"/>
               </a:rPr>
-              <a:t>3 / 62</a:t>
+              <a:t>3 / 65</a:t>
             </a:r>
           </a:p>
         </p:txBody>
@@ -27517,7 +27520,7 @@
                 </a:solidFill>
                 <a:latin typeface="微软雅黑"/>
               </a:rPr>
-              <a:t>30 / 62</a:t>
+              <a:t>30 / 65</a:t>
             </a:r>
           </a:p>
         </p:txBody>
@@ -27980,7 +27983,7 @@
                 </a:solidFill>
                 <a:latin typeface="微软雅黑"/>
               </a:rPr>
-              <a:t>31 / 62</a:t>
+              <a:t>31 / 65</a:t>
             </a:r>
           </a:p>
         </p:txBody>
@@ -28835,7 +28838,7 @@
                 </a:solidFill>
                 <a:latin typeface="微软雅黑"/>
               </a:rPr>
-              <a:t>32 / 62</a:t>
+              <a:t>32 / 65</a:t>
             </a:r>
           </a:p>
         </p:txBody>
@@ -30203,7 +30206,7 @@
                 </a:solidFill>
                 <a:latin typeface="微软雅黑"/>
               </a:rPr>
-              <a:t>33 / 62</a:t>
+              <a:t>33 / 65</a:t>
             </a:r>
           </a:p>
         </p:txBody>
@@ -30995,7 +30998,7 @@
                 </a:solidFill>
                 <a:latin typeface="微软雅黑"/>
               </a:rPr>
-              <a:t>34 / 62</a:t>
+              <a:t>34 / 65</a:t>
             </a:r>
           </a:p>
         </p:txBody>
@@ -31628,7 +31631,7 @@
                 </a:solidFill>
                 <a:latin typeface="微软雅黑"/>
               </a:rPr>
-              <a:t>35 / 62</a:t>
+              <a:t>35 / 65</a:t>
             </a:r>
           </a:p>
         </p:txBody>
@@ -32548,7 +32551,7 @@
                 </a:solidFill>
                 <a:latin typeface="微软雅黑"/>
               </a:rPr>
-              <a:t>36 / 62</a:t>
+              <a:t>36 / 65</a:t>
             </a:r>
           </a:p>
         </p:txBody>
@@ -33468,7 +33471,7 @@
                 </a:solidFill>
                 <a:latin typeface="微软雅黑"/>
               </a:rPr>
-              <a:t>37 / 62</a:t>
+              <a:t>37 / 65</a:t>
             </a:r>
           </a:p>
         </p:txBody>
@@ -34388,7 +34391,7 @@
                 </a:solidFill>
                 <a:latin typeface="微软雅黑"/>
               </a:rPr>
-              <a:t>38 / 62</a:t>
+              <a:t>38 / 65</a:t>
             </a:r>
           </a:p>
         </p:txBody>
@@ -35327,7 +35330,7 @@
                 </a:solidFill>
                 <a:latin typeface="微软雅黑"/>
               </a:rPr>
-              <a:t>39 / 62</a:t>
+              <a:t>39 / 65</a:t>
             </a:r>
           </a:p>
         </p:txBody>
@@ -36299,7 +36302,7 @@
                 </a:solidFill>
                 <a:latin typeface="微软雅黑"/>
               </a:rPr>
-              <a:t>4 / 62</a:t>
+              <a:t>4 / 65</a:t>
             </a:r>
           </a:p>
         </p:txBody>
@@ -37215,7 +37218,7 @@
                 </a:solidFill>
                 <a:latin typeface="微软雅黑"/>
               </a:rPr>
-              <a:t>40 / 62</a:t>
+              <a:t>40 / 65</a:t>
             </a:r>
           </a:p>
         </p:txBody>
@@ -38139,7 +38142,7 @@
                 </a:solidFill>
                 <a:latin typeface="微软雅黑"/>
               </a:rPr>
-              <a:t>41 / 62</a:t>
+              <a:t>41 / 65</a:t>
             </a:r>
           </a:p>
         </p:txBody>
@@ -38931,7 +38934,7 @@
                 </a:solidFill>
                 <a:latin typeface="微软雅黑"/>
               </a:rPr>
-              <a:t>42 / 62</a:t>
+              <a:t>42 / 65</a:t>
             </a:r>
           </a:p>
         </p:txBody>
@@ -39637,7 +39640,7 @@
                 </a:solidFill>
                 <a:latin typeface="微软雅黑"/>
               </a:rPr>
-              <a:t>43 / 62</a:t>
+              <a:t>43 / 65</a:t>
             </a:r>
           </a:p>
         </p:txBody>
@@ -40429,7 +40432,7 @@
                 </a:solidFill>
                 <a:latin typeface="微软雅黑"/>
               </a:rPr>
-              <a:t>44 / 62</a:t>
+              <a:t>44 / 65</a:t>
             </a:r>
           </a:p>
         </p:txBody>
@@ -41284,7 +41287,7 @@
                 </a:solidFill>
                 <a:latin typeface="微软雅黑"/>
               </a:rPr>
-              <a:t>45 / 62</a:t>
+              <a:t>45 / 65</a:t>
             </a:r>
           </a:p>
         </p:txBody>
@@ -41992,7 +41995,7 @@
                 </a:solidFill>
                 <a:latin typeface="微软雅黑"/>
               </a:rPr>
-              <a:t>46 / 62</a:t>
+              <a:t>46 / 65</a:t>
             </a:r>
           </a:p>
         </p:txBody>
@@ -42632,7 +42635,7 @@
                 </a:solidFill>
                 <a:latin typeface="微软雅黑"/>
               </a:rPr>
-              <a:t>47 / 62</a:t>
+              <a:t>50 / 65</a:t>
             </a:r>
           </a:p>
         </p:txBody>
@@ -43217,7 +43220,7 @@
                 </a:solidFill>
                 <a:latin typeface="微软雅黑"/>
               </a:rPr>
-              <a:t>48 / 62</a:t>
+              <a:t>51 / 65</a:t>
             </a:r>
           </a:p>
         </p:txBody>
@@ -44009,7 +44012,7 @@
                 </a:solidFill>
                 <a:latin typeface="微软雅黑"/>
               </a:rPr>
-              <a:t>49 / 62</a:t>
+              <a:t>52 / 65</a:t>
             </a:r>
           </a:p>
         </p:txBody>
@@ -45477,7 +45480,7 @@
                 </a:solidFill>
                 <a:latin typeface="微软雅黑"/>
               </a:rPr>
-              <a:t>5 / 62</a:t>
+              <a:t>5 / 65</a:t>
             </a:r>
           </a:p>
         </p:txBody>
@@ -46071,7 +46074,7 @@
                 </a:solidFill>
                 <a:latin typeface="微软雅黑"/>
               </a:rPr>
-              <a:t>50 / 62</a:t>
+              <a:t>53 / 65</a:t>
             </a:r>
           </a:p>
         </p:txBody>
@@ -47727,7 +47730,7 @@
                 </a:solidFill>
                 <a:latin typeface="微软雅黑"/>
               </a:rPr>
-              <a:t>51 / 62</a:t>
+              <a:t>54 / 65</a:t>
             </a:r>
           </a:p>
         </p:txBody>
@@ -48525,7 +48528,7 @@
                 </a:solidFill>
                 <a:latin typeface="微软雅黑"/>
               </a:rPr>
-              <a:t>52 / 62</a:t>
+              <a:t>55 / 65</a:t>
             </a:r>
           </a:p>
         </p:txBody>
@@ -49671,7 +49674,7 @@
                 </a:solidFill>
                 <a:latin typeface="微软雅黑"/>
               </a:rPr>
-              <a:t>53 / 62</a:t>
+              <a:t>56 / 65</a:t>
             </a:r>
           </a:p>
         </p:txBody>
@@ -50524,7 +50527,7 @@
                 </a:solidFill>
                 <a:latin typeface="微软雅黑"/>
               </a:rPr>
-              <a:t>54 / 62</a:t>
+              <a:t>57 / 65</a:t>
             </a:r>
           </a:p>
         </p:txBody>
@@ -51496,7 +51499,7 @@
                 </a:solidFill>
                 <a:latin typeface="微软雅黑"/>
               </a:rPr>
-              <a:t>55 / 62</a:t>
+              <a:t>58 / 65</a:t>
             </a:r>
           </a:p>
         </p:txBody>
@@ -52468,7 +52471,7 @@
                 </a:solidFill>
                 <a:latin typeface="微软雅黑"/>
               </a:rPr>
-              <a:t>56 / 62</a:t>
+              <a:t>59 / 65</a:t>
             </a:r>
           </a:p>
         </p:txBody>
@@ -53727,7 +53730,7 @@
                 </a:solidFill>
                 <a:latin typeface="微软雅黑"/>
               </a:rPr>
-              <a:t>57 / 62</a:t>
+              <a:t>60 / 65</a:t>
             </a:r>
           </a:p>
         </p:txBody>
@@ -54699,7 +54702,7 @@
                 </a:solidFill>
                 <a:latin typeface="微软雅黑"/>
               </a:rPr>
-              <a:t>58 / 62</a:t>
+              <a:t>61 / 65</a:t>
             </a:r>
           </a:p>
         </p:txBody>
@@ -55671,7 +55674,7 @@
                 </a:solidFill>
                 <a:latin typeface="微软雅黑"/>
               </a:rPr>
-              <a:t>59 / 62</a:t>
+              <a:t>62 / 65</a:t>
             </a:r>
           </a:p>
         </p:txBody>
@@ -56377,7 +56380,7 @@
                 </a:solidFill>
                 <a:latin typeface="微软雅黑"/>
               </a:rPr>
-              <a:t>6 / 62</a:t>
+              <a:t>6 / 65</a:t>
             </a:r>
           </a:p>
         </p:txBody>
@@ -57169,7 +57172,7 @@
                 </a:solidFill>
                 <a:latin typeface="微软雅黑"/>
               </a:rPr>
-              <a:t>60 / 62</a:t>
+              <a:t>63 / 65</a:t>
             </a:r>
           </a:p>
         </p:txBody>
@@ -57529,7 +57532,7 @@
                 </a:solidFill>
                 <a:latin typeface="微软雅黑"/>
               </a:rPr>
-              <a:t>61 / 62</a:t>
+              <a:t>64 / 65</a:t>
             </a:r>
           </a:p>
         </p:txBody>
@@ -57900,6 +57903,3020 @@
 </p:sld>
 </file>
 
+<file path=ppt/slides/slide63.xml><?xml version="1.0" encoding="utf-8"?>
+<p:sld xmlns:a="http://schemas.openxmlformats.org/drawingml/2006/main" xmlns:p="http://schemas.openxmlformats.org/presentationml/2006/main" xmlns:r="http://schemas.openxmlformats.org/officeDocument/2006/relationships">
+  <p:cSld>
+    <p:spTree>
+      <p:nvGrpSpPr>
+        <p:cNvPr id="1" name=""/>
+        <p:cNvGrpSpPr/>
+        <p:nvPr/>
+      </p:nvGrpSpPr>
+      <p:grpSpPr/>
+      <p:sp>
+        <p:nvSpPr>
+          <p:cNvPr id="2" name="Rounded Rectangle 1"/>
+          <p:cNvSpPr/>
+          <p:nvPr/>
+        </p:nvSpPr>
+        <p:spPr>
+          <a:xfrm>
+            <a:off x="0" y="0"/>
+            <a:ext cx="12191695" cy="64008"/>
+          </a:xfrm>
+          <a:prstGeom prst="roundRect">
+            <a:avLst>
+              <a:gd name="adj" fmla="val 50000"/>
+            </a:avLst>
+          </a:prstGeom>
+          <a:solidFill>
+            <a:srgbClr val="0B5E54"/>
+          </a:solidFill>
+          <a:ln>
+            <a:noFill/>
+          </a:ln>
+          <a:effectLst/>
+        </p:spPr>
+        <p:style>
+          <a:lnRef idx="1">
+            <a:schemeClr val="accent1"/>
+          </a:lnRef>
+          <a:fillRef idx="3">
+            <a:schemeClr val="accent1"/>
+          </a:fillRef>
+          <a:effectRef idx="2">
+            <a:schemeClr val="accent1"/>
+          </a:effectRef>
+          <a:fontRef idx="minor">
+            <a:schemeClr val="lt1"/>
+          </a:fontRef>
+        </p:style>
+        <p:txBody>
+          <a:bodyPr rtlCol="0" anchor="ctr"/>
+          <a:lstStyle/>
+          <a:p>
+            <a:pPr algn="ctr"/>
+          </a:p>
+        </p:txBody>
+      </p:sp>
+      <p:sp>
+        <p:nvSpPr>
+          <p:cNvPr id="3" name="TextBox 2"/>
+          <p:cNvSpPr txBox="1"/>
+          <p:nvPr/>
+        </p:nvSpPr>
+        <p:spPr>
+          <a:xfrm>
+            <a:off x="475488" y="146304"/>
+            <a:ext cx="8229600" cy="292608"/>
+          </a:xfrm>
+          <a:prstGeom prst="rect">
+            <a:avLst/>
+          </a:prstGeom>
+          <a:noFill/>
+        </p:spPr>
+        <p:txBody>
+          <a:bodyPr wrap="square" anchor="t" lIns="0" rIns="0" tIns="0" bIns="0">
+            <a:spAutoFit/>
+          </a:bodyPr>
+          <a:lstStyle/>
+          <a:p>
+            <a:pPr algn="l">
+              <a:lnSpc>
+                <a:spcPct val="114000"/>
+              </a:lnSpc>
+            </a:pPr>
+            <a:r>
+              <a:rPr sz="1100" b="1">
+                <a:solidFill>
+                  <a:srgbClr val="0B5E54"/>
+                </a:solidFill>
+              </a:rPr>
+              <a:t>工单实战 · 本次实跑结果</a:t>
+            </a:r>
+          </a:p>
+        </p:txBody>
+      </p:sp>
+      <p:sp>
+        <p:nvSpPr>
+          <p:cNvPr id="4" name="Rounded Rectangle 3"/>
+          <p:cNvSpPr/>
+          <p:nvPr/>
+        </p:nvSpPr>
+        <p:spPr>
+          <a:xfrm>
+            <a:off x="475488" y="475488"/>
+            <a:ext cx="1881187" cy="310896"/>
+          </a:xfrm>
+          <a:prstGeom prst="roundRect">
+            <a:avLst>
+              <a:gd name="adj" fmla="val 50000"/>
+            </a:avLst>
+          </a:prstGeom>
+          <a:solidFill>
+            <a:srgbClr val="C9A227"/>
+          </a:solidFill>
+          <a:ln>
+            <a:noFill/>
+          </a:ln>
+          <a:effectLst/>
+        </p:spPr>
+        <p:style>
+          <a:lnRef idx="1">
+            <a:schemeClr val="accent1"/>
+          </a:lnRef>
+          <a:fillRef idx="3">
+            <a:schemeClr val="accent1"/>
+          </a:fillRef>
+          <a:effectRef idx="2">
+            <a:schemeClr val="accent1"/>
+          </a:effectRef>
+          <a:fontRef idx="minor">
+            <a:schemeClr val="lt1"/>
+          </a:fontRef>
+        </p:style>
+        <p:txBody>
+          <a:bodyPr rtlCol="0" anchor="ctr"/>
+          <a:lstStyle/>
+          <a:p>
+            <a:pPr algn="ctr"/>
+          </a:p>
+        </p:txBody>
+      </p:sp>
+      <p:sp>
+        <p:nvSpPr>
+          <p:cNvPr id="5" name="TextBox 4"/>
+          <p:cNvSpPr txBox="1"/>
+          <p:nvPr/>
+        </p:nvSpPr>
+        <p:spPr>
+          <a:xfrm>
+            <a:off x="475488" y="475488"/>
+            <a:ext cx="1881187" cy="310896"/>
+          </a:xfrm>
+          <a:prstGeom prst="rect">
+            <a:avLst/>
+          </a:prstGeom>
+          <a:noFill/>
+        </p:spPr>
+        <p:txBody>
+          <a:bodyPr wrap="square" anchor="ctr" lIns="0" rIns="0" tIns="0" bIns="0">
+            <a:spAutoFit/>
+          </a:bodyPr>
+          <a:lstStyle/>
+          <a:p>
+            <a:pPr algn="ctr">
+              <a:lnSpc>
+                <a:spcPct val="114000"/>
+              </a:lnSpc>
+            </a:pPr>
+            <a:r>
+              <a:rPr sz="1050" b="1">
+                <a:solidFill>
+                  <a:srgbClr val="FFFFFF"/>
+                </a:solidFill>
+              </a:rPr>
+              <a:t>REAL RUN · 四档逐字实测</a:t>
+            </a:r>
+          </a:p>
+        </p:txBody>
+      </p:sp>
+      <p:sp>
+        <p:nvSpPr>
+          <p:cNvPr id="6" name="TextBox 5"/>
+          <p:cNvSpPr txBox="1"/>
+          <p:nvPr/>
+        </p:nvSpPr>
+        <p:spPr>
+          <a:xfrm>
+            <a:off x="475488" y="859536"/>
+            <a:ext cx="11237976" cy="502920"/>
+          </a:xfrm>
+          <a:prstGeom prst="rect">
+            <a:avLst/>
+          </a:prstGeom>
+          <a:noFill/>
+        </p:spPr>
+        <p:txBody>
+          <a:bodyPr wrap="square" anchor="t" lIns="0" rIns="0" tIns="0" bIns="0">
+            <a:spAutoFit/>
+          </a:bodyPr>
+          <a:lstStyle/>
+          <a:p>
+            <a:pPr algn="l">
+              <a:lnSpc>
+                <a:spcPct val="114000"/>
+              </a:lnSpc>
+            </a:pPr>
+            <a:r>
+              <a:rPr sz="2200" b="1">
+                <a:solidFill>
+                  <a:srgbClr val="1B2B28"/>
+                </a:solidFill>
+              </a:rPr>
+              <a:t>P1.2 p12_proj_template：本次 D/C/B/A 四档实测</a:t>
+            </a:r>
+          </a:p>
+        </p:txBody>
+      </p:sp>
+      <p:sp>
+        <p:nvSpPr>
+          <p:cNvPr id="7" name="Rounded Rectangle 6"/>
+          <p:cNvSpPr/>
+          <p:nvPr/>
+        </p:nvSpPr>
+        <p:spPr>
+          <a:xfrm>
+            <a:off x="475488" y="1389888"/>
+            <a:ext cx="1234440" cy="27432"/>
+          </a:xfrm>
+          <a:prstGeom prst="roundRect">
+            <a:avLst>
+              <a:gd name="adj" fmla="val 50000"/>
+            </a:avLst>
+          </a:prstGeom>
+          <a:solidFill>
+            <a:srgbClr val="C9A227"/>
+          </a:solidFill>
+          <a:ln>
+            <a:noFill/>
+          </a:ln>
+          <a:effectLst/>
+        </p:spPr>
+        <p:style>
+          <a:lnRef idx="1">
+            <a:schemeClr val="accent1"/>
+          </a:lnRef>
+          <a:fillRef idx="3">
+            <a:schemeClr val="accent1"/>
+          </a:fillRef>
+          <a:effectRef idx="2">
+            <a:schemeClr val="accent1"/>
+          </a:effectRef>
+          <a:fontRef idx="minor">
+            <a:schemeClr val="lt1"/>
+          </a:fontRef>
+        </p:style>
+        <p:txBody>
+          <a:bodyPr rtlCol="0" anchor="ctr"/>
+          <a:lstStyle/>
+          <a:p>
+            <a:pPr algn="ctr"/>
+          </a:p>
+        </p:txBody>
+      </p:sp>
+      <p:sp>
+        <p:nvSpPr>
+          <p:cNvPr id="8" name="Rounded Rectangle 7"/>
+          <p:cNvSpPr/>
+          <p:nvPr/>
+        </p:nvSpPr>
+        <p:spPr>
+          <a:xfrm>
+            <a:off x="475488" y="6419088"/>
+            <a:ext cx="11237976" cy="10972"/>
+          </a:xfrm>
+          <a:prstGeom prst="roundRect">
+            <a:avLst>
+              <a:gd name="adj" fmla="val 50000"/>
+            </a:avLst>
+          </a:prstGeom>
+          <a:solidFill>
+            <a:srgbClr val="E4F1EE"/>
+          </a:solidFill>
+          <a:ln>
+            <a:noFill/>
+          </a:ln>
+          <a:effectLst/>
+        </p:spPr>
+        <p:style>
+          <a:lnRef idx="1">
+            <a:schemeClr val="accent1"/>
+          </a:lnRef>
+          <a:fillRef idx="3">
+            <a:schemeClr val="accent1"/>
+          </a:fillRef>
+          <a:effectRef idx="2">
+            <a:schemeClr val="accent1"/>
+          </a:effectRef>
+          <a:fontRef idx="minor">
+            <a:schemeClr val="lt1"/>
+          </a:fontRef>
+        </p:style>
+        <p:txBody>
+          <a:bodyPr rtlCol="0" anchor="ctr"/>
+          <a:lstStyle/>
+          <a:p>
+            <a:pPr algn="ctr"/>
+          </a:p>
+        </p:txBody>
+      </p:sp>
+      <p:sp>
+        <p:nvSpPr>
+          <p:cNvPr id="9" name="TextBox 8"/>
+          <p:cNvSpPr txBox="1"/>
+          <p:nvPr/>
+        </p:nvSpPr>
+        <p:spPr>
+          <a:xfrm>
+            <a:off x="475488" y="6455664"/>
+            <a:ext cx="7315200" cy="292608"/>
+          </a:xfrm>
+          <a:prstGeom prst="rect">
+            <a:avLst/>
+          </a:prstGeom>
+          <a:noFill/>
+        </p:spPr>
+        <p:txBody>
+          <a:bodyPr wrap="square" anchor="t" lIns="0" rIns="0" tIns="0" bIns="0">
+            <a:spAutoFit/>
+          </a:bodyPr>
+          <a:lstStyle/>
+          <a:p>
+            <a:pPr algn="l">
+              <a:lnSpc>
+                <a:spcPct val="114000"/>
+              </a:lnSpc>
+            </a:pPr>
+            <a:r>
+              <a:rPr sz="900" b="0">
+                <a:solidFill>
+                  <a:srgbClr val="5C6E6A"/>
+                </a:solidFill>
+              </a:rPr>
+              <a:t>两江智造集团 · Python程序设计（项目实战）</a:t>
+            </a:r>
+          </a:p>
+        </p:txBody>
+      </p:sp>
+      <p:sp>
+        <p:nvSpPr>
+          <p:cNvPr id="10" name="TextBox 9"/>
+          <p:cNvSpPr txBox="1"/>
+          <p:nvPr/>
+        </p:nvSpPr>
+        <p:spPr>
+          <a:xfrm>
+            <a:off x="10597896" y="6537960"/>
+            <a:ext cx="996696" cy="301752"/>
+          </a:xfrm>
+          <a:prstGeom prst="rect">
+            <a:avLst/>
+          </a:prstGeom>
+          <a:noFill/>
+        </p:spPr>
+        <p:txBody>
+          <a:bodyPr wrap="square" anchor="t" lIns="0" rIns="0" tIns="0" bIns="0">
+            <a:spAutoFit/>
+          </a:bodyPr>
+          <a:lstStyle/>
+          <a:p>
+            <a:pPr algn="r">
+              <a:lnSpc>
+                <a:spcPct val="114000"/>
+              </a:lnSpc>
+            </a:pPr>
+            <a:r>
+              <a:rPr sz="1000" b="0">
+                <a:solidFill>
+                  <a:srgbClr val="8A97B5"/>
+                </a:solidFill>
+              </a:rPr>
+              <a:t>47 / 65</a:t>
+            </a:r>
+          </a:p>
+        </p:txBody>
+      </p:sp>
+      <p:sp>
+        <p:nvSpPr>
+          <p:cNvPr id="11" name="Rounded Rectangle 10"/>
+          <p:cNvSpPr/>
+          <p:nvPr/>
+        </p:nvSpPr>
+        <p:spPr>
+          <a:xfrm>
+            <a:off x="475488" y="1554480"/>
+            <a:ext cx="11237976" cy="1030522"/>
+          </a:xfrm>
+          <a:prstGeom prst="roundRect">
+            <a:avLst>
+              <a:gd name="adj" fmla="val 6000"/>
+            </a:avLst>
+          </a:prstGeom>
+          <a:solidFill>
+            <a:srgbClr val="FFFFFF"/>
+          </a:solidFill>
+          <a:ln w="9525">
+            <a:solidFill>
+              <a:srgbClr val="E4F1EE"/>
+            </a:solidFill>
+          </a:ln>
+          <a:effectLst/>
+        </p:spPr>
+        <p:style>
+          <a:lnRef idx="1">
+            <a:schemeClr val="accent1"/>
+          </a:lnRef>
+          <a:fillRef idx="3">
+            <a:schemeClr val="accent1"/>
+          </a:fillRef>
+          <a:effectRef idx="2">
+            <a:schemeClr val="accent1"/>
+          </a:effectRef>
+          <a:fontRef idx="minor">
+            <a:schemeClr val="lt1"/>
+          </a:fontRef>
+        </p:style>
+        <p:txBody>
+          <a:bodyPr rtlCol="0" anchor="ctr"/>
+          <a:lstStyle/>
+          <a:p>
+            <a:pPr algn="ctr"/>
+          </a:p>
+        </p:txBody>
+      </p:sp>
+      <p:sp>
+        <p:nvSpPr>
+          <p:cNvPr id="12" name="Rounded Rectangle 11"/>
+          <p:cNvSpPr/>
+          <p:nvPr/>
+        </p:nvSpPr>
+        <p:spPr>
+          <a:xfrm>
+            <a:off x="475488" y="1554480"/>
+            <a:ext cx="54864" cy="1030522"/>
+          </a:xfrm>
+          <a:prstGeom prst="roundRect">
+            <a:avLst>
+              <a:gd name="adj" fmla="val 50000"/>
+            </a:avLst>
+          </a:prstGeom>
+          <a:solidFill>
+            <a:srgbClr val="5C6E6A"/>
+          </a:solidFill>
+          <a:ln>
+            <a:noFill/>
+          </a:ln>
+          <a:effectLst/>
+        </p:spPr>
+        <p:style>
+          <a:lnRef idx="1">
+            <a:schemeClr val="accent1"/>
+          </a:lnRef>
+          <a:fillRef idx="3">
+            <a:schemeClr val="accent1"/>
+          </a:fillRef>
+          <a:effectRef idx="2">
+            <a:schemeClr val="accent1"/>
+          </a:effectRef>
+          <a:fontRef idx="minor">
+            <a:schemeClr val="lt1"/>
+          </a:fontRef>
+        </p:style>
+        <p:txBody>
+          <a:bodyPr rtlCol="0" anchor="ctr"/>
+          <a:lstStyle/>
+          <a:p>
+            <a:pPr algn="ctr"/>
+          </a:p>
+        </p:txBody>
+      </p:sp>
+      <p:sp>
+        <p:nvSpPr>
+          <p:cNvPr id="13" name="Rounded Rectangle 12"/>
+          <p:cNvSpPr/>
+          <p:nvPr/>
+        </p:nvSpPr>
+        <p:spPr>
+          <a:xfrm>
+            <a:off x="621792" y="1636776"/>
+            <a:ext cx="237744" cy="237744"/>
+          </a:xfrm>
+          <a:prstGeom prst="roundRect">
+            <a:avLst>
+              <a:gd name="adj" fmla="val 28000"/>
+            </a:avLst>
+          </a:prstGeom>
+          <a:solidFill>
+            <a:srgbClr val="5C6E6A"/>
+          </a:solidFill>
+          <a:ln>
+            <a:noFill/>
+          </a:ln>
+          <a:effectLst/>
+        </p:spPr>
+        <p:style>
+          <a:lnRef idx="1">
+            <a:schemeClr val="accent1"/>
+          </a:lnRef>
+          <a:fillRef idx="3">
+            <a:schemeClr val="accent1"/>
+          </a:fillRef>
+          <a:effectRef idx="2">
+            <a:schemeClr val="accent1"/>
+          </a:effectRef>
+          <a:fontRef idx="minor">
+            <a:schemeClr val="lt1"/>
+          </a:fontRef>
+        </p:style>
+        <p:txBody>
+          <a:bodyPr rtlCol="0" anchor="ctr"/>
+          <a:lstStyle/>
+          <a:p>
+            <a:pPr algn="ctr"/>
+          </a:p>
+        </p:txBody>
+      </p:sp>
+      <p:sp>
+        <p:nvSpPr>
+          <p:cNvPr id="14" name="TextBox 13"/>
+          <p:cNvSpPr txBox="1"/>
+          <p:nvPr/>
+        </p:nvSpPr>
+        <p:spPr>
+          <a:xfrm>
+            <a:off x="621792" y="1636776"/>
+            <a:ext cx="237744" cy="237744"/>
+          </a:xfrm>
+          <a:prstGeom prst="rect">
+            <a:avLst/>
+          </a:prstGeom>
+          <a:noFill/>
+        </p:spPr>
+        <p:txBody>
+          <a:bodyPr wrap="square" anchor="ctr" lIns="0" rIns="0" tIns="0" bIns="0">
+            <a:spAutoFit/>
+          </a:bodyPr>
+          <a:lstStyle/>
+          <a:p>
+            <a:pPr algn="ctr">
+              <a:lnSpc>
+                <a:spcPct val="114000"/>
+              </a:lnSpc>
+            </a:pPr>
+            <a:r>
+              <a:rPr sz="1000" b="1">
+                <a:solidFill>
+                  <a:srgbClr val="FFFFFF"/>
+                </a:solidFill>
+              </a:rPr>
+              <a:t>D</a:t>
+            </a:r>
+          </a:p>
+        </p:txBody>
+      </p:sp>
+      <p:sp>
+        <p:nvSpPr>
+          <p:cNvPr id="15" name="TextBox 14"/>
+          <p:cNvSpPr txBox="1"/>
+          <p:nvPr/>
+        </p:nvSpPr>
+        <p:spPr>
+          <a:xfrm>
+            <a:off x="932688" y="1618488"/>
+            <a:ext cx="8778240" cy="274320"/>
+          </a:xfrm>
+          <a:prstGeom prst="rect">
+            <a:avLst/>
+          </a:prstGeom>
+          <a:noFill/>
+        </p:spPr>
+        <p:txBody>
+          <a:bodyPr wrap="square" anchor="ctr" lIns="0" rIns="0" tIns="0" bIns="0">
+            <a:spAutoFit/>
+          </a:bodyPr>
+          <a:lstStyle/>
+          <a:p>
+            <a:pPr algn="l">
+              <a:lnSpc>
+                <a:spcPct val="114000"/>
+              </a:lnSpc>
+            </a:pPr>
+            <a:r>
+              <a:rPr sz="1050" b="1">
+                <a:solidFill>
+                  <a:srgbClr val="1B2B28"/>
+                </a:solidFill>
+              </a:rPr>
+              <a:t>及格</a:t>
+            </a:r>
+            <a:r>
+              <a:rPr sz="850" b="0">
+                <a:solidFill>
+                  <a:srgbClr val="5C6E6A"/>
+                </a:solidFill>
+              </a:rPr>
+              <a:t>   验收口径：</a:t>
+            </a:r>
+            <a:r>
+              <a:rPr sz="850" b="0">
+                <a:solidFill>
+                  <a:srgbClr val="5C6E6A"/>
+                </a:solidFill>
+              </a:rPr>
+              <a:t>conda环境激活可用+仓库初始化+结构完整+README</a:t>
+            </a:r>
+          </a:p>
+        </p:txBody>
+      </p:sp>
+      <p:sp>
+        <p:nvSpPr>
+          <p:cNvPr id="16" name="Rounded Rectangle 15"/>
+          <p:cNvSpPr/>
+          <p:nvPr/>
+        </p:nvSpPr>
+        <p:spPr>
+          <a:xfrm>
+            <a:off x="10532681" y="1645920"/>
+            <a:ext cx="1052766" cy="237744"/>
+          </a:xfrm>
+          <a:prstGeom prst="roundRect">
+            <a:avLst>
+              <a:gd name="adj" fmla="val 50000"/>
+            </a:avLst>
+          </a:prstGeom>
+          <a:solidFill>
+            <a:srgbClr val="C9A227"/>
+          </a:solidFill>
+          <a:ln>
+            <a:noFill/>
+          </a:ln>
+          <a:effectLst/>
+        </p:spPr>
+        <p:style>
+          <a:lnRef idx="1">
+            <a:schemeClr val="accent1"/>
+          </a:lnRef>
+          <a:fillRef idx="3">
+            <a:schemeClr val="accent1"/>
+          </a:fillRef>
+          <a:effectRef idx="2">
+            <a:schemeClr val="accent1"/>
+          </a:effectRef>
+          <a:fontRef idx="minor">
+            <a:schemeClr val="lt1"/>
+          </a:fontRef>
+        </p:style>
+        <p:txBody>
+          <a:bodyPr rtlCol="0" anchor="ctr"/>
+          <a:lstStyle/>
+          <a:p>
+            <a:pPr algn="ctr"/>
+          </a:p>
+        </p:txBody>
+      </p:sp>
+      <p:sp>
+        <p:nvSpPr>
+          <p:cNvPr id="17" name="TextBox 16"/>
+          <p:cNvSpPr txBox="1"/>
+          <p:nvPr/>
+        </p:nvSpPr>
+        <p:spPr>
+          <a:xfrm>
+            <a:off x="10532681" y="1645920"/>
+            <a:ext cx="1052766" cy="237744"/>
+          </a:xfrm>
+          <a:prstGeom prst="rect">
+            <a:avLst/>
+          </a:prstGeom>
+          <a:noFill/>
+        </p:spPr>
+        <p:txBody>
+          <a:bodyPr wrap="square" anchor="ctr" lIns="0" rIns="0" tIns="0" bIns="0">
+            <a:spAutoFit/>
+          </a:bodyPr>
+          <a:lstStyle/>
+          <a:p>
+            <a:pPr algn="ctr">
+              <a:lnSpc>
+                <a:spcPct val="114000"/>
+              </a:lnSpc>
+            </a:pPr>
+            <a:r>
+              <a:rPr sz="850" b="1">
+                <a:solidFill>
+                  <a:srgbClr val="FFFFFF"/>
+                </a:solidFill>
+              </a:rPr>
+              <a:t>本节取证项 通过</a:t>
+            </a:r>
+          </a:p>
+        </p:txBody>
+      </p:sp>
+      <p:sp>
+        <p:nvSpPr>
+          <p:cNvPr id="18" name="TextBox 17"/>
+          <p:cNvSpPr txBox="1"/>
+          <p:nvPr/>
+        </p:nvSpPr>
+        <p:spPr>
+          <a:xfrm>
+            <a:off x="932688" y="1901952"/>
+            <a:ext cx="10671047" cy="628186"/>
+          </a:xfrm>
+          <a:prstGeom prst="rect">
+            <a:avLst/>
+          </a:prstGeom>
+          <a:noFill/>
+        </p:spPr>
+        <p:txBody>
+          <a:bodyPr wrap="square" anchor="t" lIns="0" rIns="0" tIns="0" bIns="0">
+            <a:spAutoFit/>
+          </a:bodyPr>
+          <a:lstStyle/>
+          <a:p>
+            <a:pPr algn="l">
+              <a:lnSpc>
+                <a:spcPct val="114000"/>
+              </a:lnSpc>
+            </a:pPr>
+            <a:r>
+              <a:rPr sz="950" b="0">
+                <a:solidFill>
+                  <a:srgbClr val="1B2B28"/>
+                </a:solidFill>
+              </a:rPr>
+              <a:t>结构完整=是（四目录 4/4、模板缺失 0、空目录 0、.pyc 0）｜README.md 已落盘 889 字节且首行为一级标题=是｜仓库初始化三连（git init / git add . / git commit -m）=是｜venv 激活命令写在 setup_venv.sh=是｜本流水线解释器位于 conda 环境目录=是</a:t>
+            </a:r>
+          </a:p>
+        </p:txBody>
+      </p:sp>
+      <p:sp>
+        <p:nvSpPr>
+          <p:cNvPr id="19" name="Rounded Rectangle 18"/>
+          <p:cNvSpPr/>
+          <p:nvPr/>
+        </p:nvSpPr>
+        <p:spPr>
+          <a:xfrm>
+            <a:off x="475488" y="2649010"/>
+            <a:ext cx="11237976" cy="1030522"/>
+          </a:xfrm>
+          <a:prstGeom prst="roundRect">
+            <a:avLst>
+              <a:gd name="adj" fmla="val 6000"/>
+            </a:avLst>
+          </a:prstGeom>
+          <a:solidFill>
+            <a:srgbClr val="FFFFFF"/>
+          </a:solidFill>
+          <a:ln w="9525">
+            <a:solidFill>
+              <a:srgbClr val="E4F1EE"/>
+            </a:solidFill>
+          </a:ln>
+          <a:effectLst/>
+        </p:spPr>
+        <p:style>
+          <a:lnRef idx="1">
+            <a:schemeClr val="accent1"/>
+          </a:lnRef>
+          <a:fillRef idx="3">
+            <a:schemeClr val="accent1"/>
+          </a:fillRef>
+          <a:effectRef idx="2">
+            <a:schemeClr val="accent1"/>
+          </a:effectRef>
+          <a:fontRef idx="minor">
+            <a:schemeClr val="lt1"/>
+          </a:fontRef>
+        </p:style>
+        <p:txBody>
+          <a:bodyPr rtlCol="0" anchor="ctr"/>
+          <a:lstStyle/>
+          <a:p>
+            <a:pPr algn="ctr"/>
+          </a:p>
+        </p:txBody>
+      </p:sp>
+      <p:sp>
+        <p:nvSpPr>
+          <p:cNvPr id="20" name="Rounded Rectangle 19"/>
+          <p:cNvSpPr/>
+          <p:nvPr/>
+        </p:nvSpPr>
+        <p:spPr>
+          <a:xfrm>
+            <a:off x="475488" y="2649010"/>
+            <a:ext cx="54864" cy="1030522"/>
+          </a:xfrm>
+          <a:prstGeom prst="roundRect">
+            <a:avLst>
+              <a:gd name="adj" fmla="val 50000"/>
+            </a:avLst>
+          </a:prstGeom>
+          <a:solidFill>
+            <a:srgbClr val="157A6D"/>
+          </a:solidFill>
+          <a:ln>
+            <a:noFill/>
+          </a:ln>
+          <a:effectLst/>
+        </p:spPr>
+        <p:style>
+          <a:lnRef idx="1">
+            <a:schemeClr val="accent1"/>
+          </a:lnRef>
+          <a:fillRef idx="3">
+            <a:schemeClr val="accent1"/>
+          </a:fillRef>
+          <a:effectRef idx="2">
+            <a:schemeClr val="accent1"/>
+          </a:effectRef>
+          <a:fontRef idx="minor">
+            <a:schemeClr val="lt1"/>
+          </a:fontRef>
+        </p:style>
+        <p:txBody>
+          <a:bodyPr rtlCol="0" anchor="ctr"/>
+          <a:lstStyle/>
+          <a:p>
+            <a:pPr algn="ctr"/>
+          </a:p>
+        </p:txBody>
+      </p:sp>
+      <p:sp>
+        <p:nvSpPr>
+          <p:cNvPr id="21" name="Rounded Rectangle 20"/>
+          <p:cNvSpPr/>
+          <p:nvPr/>
+        </p:nvSpPr>
+        <p:spPr>
+          <a:xfrm>
+            <a:off x="621792" y="2731306"/>
+            <a:ext cx="237744" cy="237744"/>
+          </a:xfrm>
+          <a:prstGeom prst="roundRect">
+            <a:avLst>
+              <a:gd name="adj" fmla="val 28000"/>
+            </a:avLst>
+          </a:prstGeom>
+          <a:solidFill>
+            <a:srgbClr val="157A6D"/>
+          </a:solidFill>
+          <a:ln>
+            <a:noFill/>
+          </a:ln>
+          <a:effectLst/>
+        </p:spPr>
+        <p:style>
+          <a:lnRef idx="1">
+            <a:schemeClr val="accent1"/>
+          </a:lnRef>
+          <a:fillRef idx="3">
+            <a:schemeClr val="accent1"/>
+          </a:fillRef>
+          <a:effectRef idx="2">
+            <a:schemeClr val="accent1"/>
+          </a:effectRef>
+          <a:fontRef idx="minor">
+            <a:schemeClr val="lt1"/>
+          </a:fontRef>
+        </p:style>
+        <p:txBody>
+          <a:bodyPr rtlCol="0" anchor="ctr"/>
+          <a:lstStyle/>
+          <a:p>
+            <a:pPr algn="ctr"/>
+          </a:p>
+        </p:txBody>
+      </p:sp>
+      <p:sp>
+        <p:nvSpPr>
+          <p:cNvPr id="22" name="TextBox 21"/>
+          <p:cNvSpPr txBox="1"/>
+          <p:nvPr/>
+        </p:nvSpPr>
+        <p:spPr>
+          <a:xfrm>
+            <a:off x="621792" y="2731306"/>
+            <a:ext cx="237744" cy="237744"/>
+          </a:xfrm>
+          <a:prstGeom prst="rect">
+            <a:avLst/>
+          </a:prstGeom>
+          <a:noFill/>
+        </p:spPr>
+        <p:txBody>
+          <a:bodyPr wrap="square" anchor="ctr" lIns="0" rIns="0" tIns="0" bIns="0">
+            <a:spAutoFit/>
+          </a:bodyPr>
+          <a:lstStyle/>
+          <a:p>
+            <a:pPr algn="ctr">
+              <a:lnSpc>
+                <a:spcPct val="114000"/>
+              </a:lnSpc>
+            </a:pPr>
+            <a:r>
+              <a:rPr sz="1000" b="1">
+                <a:solidFill>
+                  <a:srgbClr val="FFFFFF"/>
+                </a:solidFill>
+              </a:rPr>
+              <a:t>C</a:t>
+            </a:r>
+          </a:p>
+        </p:txBody>
+      </p:sp>
+      <p:sp>
+        <p:nvSpPr>
+          <p:cNvPr id="23" name="TextBox 22"/>
+          <p:cNvSpPr txBox="1"/>
+          <p:nvPr/>
+        </p:nvSpPr>
+        <p:spPr>
+          <a:xfrm>
+            <a:off x="932688" y="2713018"/>
+            <a:ext cx="8778240" cy="274320"/>
+          </a:xfrm>
+          <a:prstGeom prst="rect">
+            <a:avLst/>
+          </a:prstGeom>
+          <a:noFill/>
+        </p:spPr>
+        <p:txBody>
+          <a:bodyPr wrap="square" anchor="ctr" lIns="0" rIns="0" tIns="0" bIns="0">
+            <a:spAutoFit/>
+          </a:bodyPr>
+          <a:lstStyle/>
+          <a:p>
+            <a:pPr algn="l">
+              <a:lnSpc>
+                <a:spcPct val="114000"/>
+              </a:lnSpc>
+            </a:pPr>
+            <a:r>
+              <a:rPr sz="1050" b="1">
+                <a:solidFill>
+                  <a:srgbClr val="1B2B28"/>
+                </a:solidFill>
+              </a:rPr>
+              <a:t>良好</a:t>
+            </a:r>
+            <a:r>
+              <a:rPr sz="850" b="0">
+                <a:solidFill>
+                  <a:srgbClr val="5C6E6A"/>
+                </a:solidFill>
+              </a:rPr>
+              <a:t>   验收口径：</a:t>
+            </a:r>
+            <a:r>
+              <a:rPr sz="850" b="0">
+                <a:solidFill>
+                  <a:srgbClr val="5C6E6A"/>
+                </a:solidFill>
+              </a:rPr>
+              <a:t>检查工具配置生效；pytest通过</a:t>
+            </a:r>
+          </a:p>
+        </p:txBody>
+      </p:sp>
+      <p:sp>
+        <p:nvSpPr>
+          <p:cNvPr id="24" name="Rounded Rectangle 23"/>
+          <p:cNvSpPr/>
+          <p:nvPr/>
+        </p:nvSpPr>
+        <p:spPr>
+          <a:xfrm>
+            <a:off x="10532681" y="2740450"/>
+            <a:ext cx="1052766" cy="237744"/>
+          </a:xfrm>
+          <a:prstGeom prst="roundRect">
+            <a:avLst>
+              <a:gd name="adj" fmla="val 50000"/>
+            </a:avLst>
+          </a:prstGeom>
+          <a:solidFill>
+            <a:srgbClr val="C9A227"/>
+          </a:solidFill>
+          <a:ln>
+            <a:noFill/>
+          </a:ln>
+          <a:effectLst/>
+        </p:spPr>
+        <p:style>
+          <a:lnRef idx="1">
+            <a:schemeClr val="accent1"/>
+          </a:lnRef>
+          <a:fillRef idx="3">
+            <a:schemeClr val="accent1"/>
+          </a:fillRef>
+          <a:effectRef idx="2">
+            <a:schemeClr val="accent1"/>
+          </a:effectRef>
+          <a:fontRef idx="minor">
+            <a:schemeClr val="lt1"/>
+          </a:fontRef>
+        </p:style>
+        <p:txBody>
+          <a:bodyPr rtlCol="0" anchor="ctr"/>
+          <a:lstStyle/>
+          <a:p>
+            <a:pPr algn="ctr"/>
+          </a:p>
+        </p:txBody>
+      </p:sp>
+      <p:sp>
+        <p:nvSpPr>
+          <p:cNvPr id="25" name="TextBox 24"/>
+          <p:cNvSpPr txBox="1"/>
+          <p:nvPr/>
+        </p:nvSpPr>
+        <p:spPr>
+          <a:xfrm>
+            <a:off x="10532681" y="2740450"/>
+            <a:ext cx="1052766" cy="237744"/>
+          </a:xfrm>
+          <a:prstGeom prst="rect">
+            <a:avLst/>
+          </a:prstGeom>
+          <a:noFill/>
+        </p:spPr>
+        <p:txBody>
+          <a:bodyPr wrap="square" anchor="ctr" lIns="0" rIns="0" tIns="0" bIns="0">
+            <a:spAutoFit/>
+          </a:bodyPr>
+          <a:lstStyle/>
+          <a:p>
+            <a:pPr algn="ctr">
+              <a:lnSpc>
+                <a:spcPct val="114000"/>
+              </a:lnSpc>
+            </a:pPr>
+            <a:r>
+              <a:rPr sz="850" b="1">
+                <a:solidFill>
+                  <a:srgbClr val="FFFFFF"/>
+                </a:solidFill>
+              </a:rPr>
+              <a:t>本节取证项 通过</a:t>
+            </a:r>
+          </a:p>
+        </p:txBody>
+      </p:sp>
+      <p:sp>
+        <p:nvSpPr>
+          <p:cNvPr id="26" name="TextBox 25"/>
+          <p:cNvSpPr txBox="1"/>
+          <p:nvPr/>
+        </p:nvSpPr>
+        <p:spPr>
+          <a:xfrm>
+            <a:off x="932688" y="2996482"/>
+            <a:ext cx="10671047" cy="628186"/>
+          </a:xfrm>
+          <a:prstGeom prst="rect">
+            <a:avLst/>
+          </a:prstGeom>
+          <a:noFill/>
+        </p:spPr>
+        <p:txBody>
+          <a:bodyPr wrap="square" anchor="t" lIns="0" rIns="0" tIns="0" bIns="0">
+            <a:spAutoFit/>
+          </a:bodyPr>
+          <a:lstStyle/>
+          <a:p>
+            <a:pPr algn="l">
+              <a:lnSpc>
+                <a:spcPct val="114000"/>
+              </a:lnSpc>
+            </a:pPr>
+            <a:r>
+              <a:rPr sz="950" b="0">
+                <a:solidFill>
+                  <a:srgbClr val="1B2B28"/>
+                </a:solidFill>
+              </a:rPr>
+              <a:t>检查工具配置：2 个钩子全部带 entry（2/2，black, flake8）｜配置要求的工具缺口 0 个｜pytest 配置 testpaths 已声明=是｜生成骨架真实加载：入口 main() 返回 0、自带 test_ 函数 3 个通过 3 个失败 0 个｜--fail-under 评分 entry 已声明=否</a:t>
+            </a:r>
+          </a:p>
+        </p:txBody>
+      </p:sp>
+      <p:sp>
+        <p:nvSpPr>
+          <p:cNvPr id="27" name="Rounded Rectangle 26"/>
+          <p:cNvSpPr/>
+          <p:nvPr/>
+        </p:nvSpPr>
+        <p:spPr>
+          <a:xfrm>
+            <a:off x="475488" y="3743541"/>
+            <a:ext cx="11237976" cy="802849"/>
+          </a:xfrm>
+          <a:prstGeom prst="roundRect">
+            <a:avLst>
+              <a:gd name="adj" fmla="val 6000"/>
+            </a:avLst>
+          </a:prstGeom>
+          <a:solidFill>
+            <a:srgbClr val="FFFFFF"/>
+          </a:solidFill>
+          <a:ln w="9525">
+            <a:solidFill>
+              <a:srgbClr val="E4F1EE"/>
+            </a:solidFill>
+          </a:ln>
+          <a:effectLst/>
+        </p:spPr>
+        <p:style>
+          <a:lnRef idx="1">
+            <a:schemeClr val="accent1"/>
+          </a:lnRef>
+          <a:fillRef idx="3">
+            <a:schemeClr val="accent1"/>
+          </a:fillRef>
+          <a:effectRef idx="2">
+            <a:schemeClr val="accent1"/>
+          </a:effectRef>
+          <a:fontRef idx="minor">
+            <a:schemeClr val="lt1"/>
+          </a:fontRef>
+        </p:style>
+        <p:txBody>
+          <a:bodyPr rtlCol="0" anchor="ctr"/>
+          <a:lstStyle/>
+          <a:p>
+            <a:pPr algn="ctr"/>
+          </a:p>
+        </p:txBody>
+      </p:sp>
+      <p:sp>
+        <p:nvSpPr>
+          <p:cNvPr id="28" name="Rounded Rectangle 27"/>
+          <p:cNvSpPr/>
+          <p:nvPr/>
+        </p:nvSpPr>
+        <p:spPr>
+          <a:xfrm>
+            <a:off x="475488" y="3743541"/>
+            <a:ext cx="54864" cy="802849"/>
+          </a:xfrm>
+          <a:prstGeom prst="roundRect">
+            <a:avLst>
+              <a:gd name="adj" fmla="val 50000"/>
+            </a:avLst>
+          </a:prstGeom>
+          <a:solidFill>
+            <a:srgbClr val="0B5E54"/>
+          </a:solidFill>
+          <a:ln>
+            <a:noFill/>
+          </a:ln>
+          <a:effectLst/>
+        </p:spPr>
+        <p:style>
+          <a:lnRef idx="1">
+            <a:schemeClr val="accent1"/>
+          </a:lnRef>
+          <a:fillRef idx="3">
+            <a:schemeClr val="accent1"/>
+          </a:fillRef>
+          <a:effectRef idx="2">
+            <a:schemeClr val="accent1"/>
+          </a:effectRef>
+          <a:fontRef idx="minor">
+            <a:schemeClr val="lt1"/>
+          </a:fontRef>
+        </p:style>
+        <p:txBody>
+          <a:bodyPr rtlCol="0" anchor="ctr"/>
+          <a:lstStyle/>
+          <a:p>
+            <a:pPr algn="ctr"/>
+          </a:p>
+        </p:txBody>
+      </p:sp>
+      <p:sp>
+        <p:nvSpPr>
+          <p:cNvPr id="29" name="Rounded Rectangle 28"/>
+          <p:cNvSpPr/>
+          <p:nvPr/>
+        </p:nvSpPr>
+        <p:spPr>
+          <a:xfrm>
+            <a:off x="621792" y="3825837"/>
+            <a:ext cx="237744" cy="237744"/>
+          </a:xfrm>
+          <a:prstGeom prst="roundRect">
+            <a:avLst>
+              <a:gd name="adj" fmla="val 28000"/>
+            </a:avLst>
+          </a:prstGeom>
+          <a:solidFill>
+            <a:srgbClr val="0B5E54"/>
+          </a:solidFill>
+          <a:ln>
+            <a:noFill/>
+          </a:ln>
+          <a:effectLst/>
+        </p:spPr>
+        <p:style>
+          <a:lnRef idx="1">
+            <a:schemeClr val="accent1"/>
+          </a:lnRef>
+          <a:fillRef idx="3">
+            <a:schemeClr val="accent1"/>
+          </a:fillRef>
+          <a:effectRef idx="2">
+            <a:schemeClr val="accent1"/>
+          </a:effectRef>
+          <a:fontRef idx="minor">
+            <a:schemeClr val="lt1"/>
+          </a:fontRef>
+        </p:style>
+        <p:txBody>
+          <a:bodyPr rtlCol="0" anchor="ctr"/>
+          <a:lstStyle/>
+          <a:p>
+            <a:pPr algn="ctr"/>
+          </a:p>
+        </p:txBody>
+      </p:sp>
+      <p:sp>
+        <p:nvSpPr>
+          <p:cNvPr id="30" name="TextBox 29"/>
+          <p:cNvSpPr txBox="1"/>
+          <p:nvPr/>
+        </p:nvSpPr>
+        <p:spPr>
+          <a:xfrm>
+            <a:off x="621792" y="3825837"/>
+            <a:ext cx="237744" cy="237744"/>
+          </a:xfrm>
+          <a:prstGeom prst="rect">
+            <a:avLst/>
+          </a:prstGeom>
+          <a:noFill/>
+        </p:spPr>
+        <p:txBody>
+          <a:bodyPr wrap="square" anchor="ctr" lIns="0" rIns="0" tIns="0" bIns="0">
+            <a:spAutoFit/>
+          </a:bodyPr>
+          <a:lstStyle/>
+          <a:p>
+            <a:pPr algn="ctr">
+              <a:lnSpc>
+                <a:spcPct val="114000"/>
+              </a:lnSpc>
+            </a:pPr>
+            <a:r>
+              <a:rPr sz="1000" b="1">
+                <a:solidFill>
+                  <a:srgbClr val="FFFFFF"/>
+                </a:solidFill>
+              </a:rPr>
+              <a:t>B</a:t>
+            </a:r>
+          </a:p>
+        </p:txBody>
+      </p:sp>
+      <p:sp>
+        <p:nvSpPr>
+          <p:cNvPr id="31" name="TextBox 30"/>
+          <p:cNvSpPr txBox="1"/>
+          <p:nvPr/>
+        </p:nvSpPr>
+        <p:spPr>
+          <a:xfrm>
+            <a:off x="932688" y="3807549"/>
+            <a:ext cx="8778240" cy="274320"/>
+          </a:xfrm>
+          <a:prstGeom prst="rect">
+            <a:avLst/>
+          </a:prstGeom>
+          <a:noFill/>
+        </p:spPr>
+        <p:txBody>
+          <a:bodyPr wrap="square" anchor="ctr" lIns="0" rIns="0" tIns="0" bIns="0">
+            <a:spAutoFit/>
+          </a:bodyPr>
+          <a:lstStyle/>
+          <a:p>
+            <a:pPr algn="l">
+              <a:lnSpc>
+                <a:spcPct val="114000"/>
+              </a:lnSpc>
+            </a:pPr>
+            <a:r>
+              <a:rPr sz="1050" b="1">
+                <a:solidFill>
+                  <a:srgbClr val="1B2B28"/>
+                </a:solidFill>
+              </a:rPr>
+              <a:t>优秀</a:t>
+            </a:r>
+            <a:r>
+              <a:rPr sz="850" b="0">
+                <a:solidFill>
+                  <a:srgbClr val="5C6E6A"/>
+                </a:solidFill>
+              </a:rPr>
+              <a:t>   验收口径：</a:t>
+            </a:r>
+            <a:r>
+              <a:rPr sz="850" b="0">
+                <a:solidFill>
+                  <a:srgbClr val="5C6E6A"/>
+                </a:solidFill>
+              </a:rPr>
+              <a:t>依赖可还原（requirements完整）；dev分支规范合并</a:t>
+            </a:r>
+          </a:p>
+        </p:txBody>
+      </p:sp>
+      <p:sp>
+        <p:nvSpPr>
+          <p:cNvPr id="32" name="Rounded Rectangle 31"/>
+          <p:cNvSpPr/>
+          <p:nvPr/>
+        </p:nvSpPr>
+        <p:spPr>
+          <a:xfrm>
+            <a:off x="10532681" y="3834981"/>
+            <a:ext cx="1052766" cy="237744"/>
+          </a:xfrm>
+          <a:prstGeom prst="roundRect">
+            <a:avLst>
+              <a:gd name="adj" fmla="val 50000"/>
+            </a:avLst>
+          </a:prstGeom>
+          <a:solidFill>
+            <a:srgbClr val="C9A227"/>
+          </a:solidFill>
+          <a:ln>
+            <a:noFill/>
+          </a:ln>
+          <a:effectLst/>
+        </p:spPr>
+        <p:style>
+          <a:lnRef idx="1">
+            <a:schemeClr val="accent1"/>
+          </a:lnRef>
+          <a:fillRef idx="3">
+            <a:schemeClr val="accent1"/>
+          </a:fillRef>
+          <a:effectRef idx="2">
+            <a:schemeClr val="accent1"/>
+          </a:effectRef>
+          <a:fontRef idx="minor">
+            <a:schemeClr val="lt1"/>
+          </a:fontRef>
+        </p:style>
+        <p:txBody>
+          <a:bodyPr rtlCol="0" anchor="ctr"/>
+          <a:lstStyle/>
+          <a:p>
+            <a:pPr algn="ctr"/>
+          </a:p>
+        </p:txBody>
+      </p:sp>
+      <p:sp>
+        <p:nvSpPr>
+          <p:cNvPr id="33" name="TextBox 32"/>
+          <p:cNvSpPr txBox="1"/>
+          <p:nvPr/>
+        </p:nvSpPr>
+        <p:spPr>
+          <a:xfrm>
+            <a:off x="10532681" y="3834981"/>
+            <a:ext cx="1052766" cy="237744"/>
+          </a:xfrm>
+          <a:prstGeom prst="rect">
+            <a:avLst/>
+          </a:prstGeom>
+          <a:noFill/>
+        </p:spPr>
+        <p:txBody>
+          <a:bodyPr wrap="square" anchor="ctr" lIns="0" rIns="0" tIns="0" bIns="0">
+            <a:spAutoFit/>
+          </a:bodyPr>
+          <a:lstStyle/>
+          <a:p>
+            <a:pPr algn="ctr">
+              <a:lnSpc>
+                <a:spcPct val="114000"/>
+              </a:lnSpc>
+            </a:pPr>
+            <a:r>
+              <a:rPr sz="850" b="1">
+                <a:solidFill>
+                  <a:srgbClr val="FFFFFF"/>
+                </a:solidFill>
+              </a:rPr>
+              <a:t>本节取证项 通过</a:t>
+            </a:r>
+          </a:p>
+        </p:txBody>
+      </p:sp>
+      <p:sp>
+        <p:nvSpPr>
+          <p:cNvPr id="34" name="TextBox 33"/>
+          <p:cNvSpPr txBox="1"/>
+          <p:nvPr/>
+        </p:nvSpPr>
+        <p:spPr>
+          <a:xfrm>
+            <a:off x="932688" y="4091013"/>
+            <a:ext cx="10671047" cy="400513"/>
+          </a:xfrm>
+          <a:prstGeom prst="rect">
+            <a:avLst/>
+          </a:prstGeom>
+          <a:noFill/>
+        </p:spPr>
+        <p:txBody>
+          <a:bodyPr wrap="square" anchor="t" lIns="0" rIns="0" tIns="0" bIns="0">
+            <a:spAutoFit/>
+          </a:bodyPr>
+          <a:lstStyle/>
+          <a:p>
+            <a:pPr algn="l">
+              <a:lnSpc>
+                <a:spcPct val="114000"/>
+              </a:lnSpc>
+            </a:pPr>
+            <a:r>
+              <a:rPr sz="950" b="0">
+                <a:solidFill>
+                  <a:srgbClr val="1B2B28"/>
+                </a:solidFill>
+              </a:rPr>
+              <a:t>运行依赖 2/2 条钉下限｜开发依赖 4/4 条钉下限｜-r 引用 requirements.txt=是｜与运行依赖重名的开发项 0 个（无）｜git branch dev=是、git checkout dev=是、--no-ff 合并=是</a:t>
+            </a:r>
+          </a:p>
+        </p:txBody>
+      </p:sp>
+      <p:sp>
+        <p:nvSpPr>
+          <p:cNvPr id="35" name="Rounded Rectangle 34"/>
+          <p:cNvSpPr/>
+          <p:nvPr/>
+        </p:nvSpPr>
+        <p:spPr>
+          <a:xfrm>
+            <a:off x="475488" y="4610398"/>
+            <a:ext cx="11237976" cy="802849"/>
+          </a:xfrm>
+          <a:prstGeom prst="roundRect">
+            <a:avLst>
+              <a:gd name="adj" fmla="val 6000"/>
+            </a:avLst>
+          </a:prstGeom>
+          <a:solidFill>
+            <a:srgbClr val="FFFFFF"/>
+          </a:solidFill>
+          <a:ln w="9525">
+            <a:solidFill>
+              <a:srgbClr val="E4F1EE"/>
+            </a:solidFill>
+          </a:ln>
+          <a:effectLst/>
+        </p:spPr>
+        <p:style>
+          <a:lnRef idx="1">
+            <a:schemeClr val="accent1"/>
+          </a:lnRef>
+          <a:fillRef idx="3">
+            <a:schemeClr val="accent1"/>
+          </a:fillRef>
+          <a:effectRef idx="2">
+            <a:schemeClr val="accent1"/>
+          </a:effectRef>
+          <a:fontRef idx="minor">
+            <a:schemeClr val="lt1"/>
+          </a:fontRef>
+        </p:style>
+        <p:txBody>
+          <a:bodyPr rtlCol="0" anchor="ctr"/>
+          <a:lstStyle/>
+          <a:p>
+            <a:pPr algn="ctr"/>
+          </a:p>
+        </p:txBody>
+      </p:sp>
+      <p:sp>
+        <p:nvSpPr>
+          <p:cNvPr id="36" name="Rounded Rectangle 35"/>
+          <p:cNvSpPr/>
+          <p:nvPr/>
+        </p:nvSpPr>
+        <p:spPr>
+          <a:xfrm>
+            <a:off x="475488" y="4610398"/>
+            <a:ext cx="54864" cy="802849"/>
+          </a:xfrm>
+          <a:prstGeom prst="roundRect">
+            <a:avLst>
+              <a:gd name="adj" fmla="val 50000"/>
+            </a:avLst>
+          </a:prstGeom>
+          <a:solidFill>
+            <a:srgbClr val="C9A227"/>
+          </a:solidFill>
+          <a:ln>
+            <a:noFill/>
+          </a:ln>
+          <a:effectLst/>
+        </p:spPr>
+        <p:style>
+          <a:lnRef idx="1">
+            <a:schemeClr val="accent1"/>
+          </a:lnRef>
+          <a:fillRef idx="3">
+            <a:schemeClr val="accent1"/>
+          </a:fillRef>
+          <a:effectRef idx="2">
+            <a:schemeClr val="accent1"/>
+          </a:effectRef>
+          <a:fontRef idx="minor">
+            <a:schemeClr val="lt1"/>
+          </a:fontRef>
+        </p:style>
+        <p:txBody>
+          <a:bodyPr rtlCol="0" anchor="ctr"/>
+          <a:lstStyle/>
+          <a:p>
+            <a:pPr algn="ctr"/>
+          </a:p>
+        </p:txBody>
+      </p:sp>
+      <p:sp>
+        <p:nvSpPr>
+          <p:cNvPr id="37" name="Rounded Rectangle 36"/>
+          <p:cNvSpPr/>
+          <p:nvPr/>
+        </p:nvSpPr>
+        <p:spPr>
+          <a:xfrm>
+            <a:off x="621792" y="4692694"/>
+            <a:ext cx="237744" cy="237744"/>
+          </a:xfrm>
+          <a:prstGeom prst="roundRect">
+            <a:avLst>
+              <a:gd name="adj" fmla="val 28000"/>
+            </a:avLst>
+          </a:prstGeom>
+          <a:solidFill>
+            <a:srgbClr val="C9A227"/>
+          </a:solidFill>
+          <a:ln>
+            <a:noFill/>
+          </a:ln>
+          <a:effectLst/>
+        </p:spPr>
+        <p:style>
+          <a:lnRef idx="1">
+            <a:schemeClr val="accent1"/>
+          </a:lnRef>
+          <a:fillRef idx="3">
+            <a:schemeClr val="accent1"/>
+          </a:fillRef>
+          <a:effectRef idx="2">
+            <a:schemeClr val="accent1"/>
+          </a:effectRef>
+          <a:fontRef idx="minor">
+            <a:schemeClr val="lt1"/>
+          </a:fontRef>
+        </p:style>
+        <p:txBody>
+          <a:bodyPr rtlCol="0" anchor="ctr"/>
+          <a:lstStyle/>
+          <a:p>
+            <a:pPr algn="ctr"/>
+          </a:p>
+        </p:txBody>
+      </p:sp>
+      <p:sp>
+        <p:nvSpPr>
+          <p:cNvPr id="38" name="TextBox 37"/>
+          <p:cNvSpPr txBox="1"/>
+          <p:nvPr/>
+        </p:nvSpPr>
+        <p:spPr>
+          <a:xfrm>
+            <a:off x="621792" y="4692694"/>
+            <a:ext cx="237744" cy="237744"/>
+          </a:xfrm>
+          <a:prstGeom prst="rect">
+            <a:avLst/>
+          </a:prstGeom>
+          <a:noFill/>
+        </p:spPr>
+        <p:txBody>
+          <a:bodyPr wrap="square" anchor="ctr" lIns="0" rIns="0" tIns="0" bIns="0">
+            <a:spAutoFit/>
+          </a:bodyPr>
+          <a:lstStyle/>
+          <a:p>
+            <a:pPr algn="ctr">
+              <a:lnSpc>
+                <a:spcPct val="114000"/>
+              </a:lnSpc>
+            </a:pPr>
+            <a:r>
+              <a:rPr sz="1000" b="1">
+                <a:solidFill>
+                  <a:srgbClr val="FFFFFF"/>
+                </a:solidFill>
+              </a:rPr>
+              <a:t>A</a:t>
+            </a:r>
+          </a:p>
+        </p:txBody>
+      </p:sp>
+      <p:sp>
+        <p:nvSpPr>
+          <p:cNvPr id="39" name="TextBox 38"/>
+          <p:cNvSpPr txBox="1"/>
+          <p:nvPr/>
+        </p:nvSpPr>
+        <p:spPr>
+          <a:xfrm>
+            <a:off x="932688" y="4674406"/>
+            <a:ext cx="8778240" cy="274320"/>
+          </a:xfrm>
+          <a:prstGeom prst="rect">
+            <a:avLst/>
+          </a:prstGeom>
+          <a:noFill/>
+        </p:spPr>
+        <p:txBody>
+          <a:bodyPr wrap="square" anchor="ctr" lIns="0" rIns="0" tIns="0" bIns="0">
+            <a:spAutoFit/>
+          </a:bodyPr>
+          <a:lstStyle/>
+          <a:p>
+            <a:pPr algn="l">
+              <a:lnSpc>
+                <a:spcPct val="114000"/>
+              </a:lnSpc>
+            </a:pPr>
+            <a:r>
+              <a:rPr sz="1050" b="1">
+                <a:solidFill>
+                  <a:srgbClr val="1B2B28"/>
+                </a:solidFill>
+              </a:rPr>
+              <a:t>超优</a:t>
+            </a:r>
+            <a:r>
+              <a:rPr sz="850" b="0">
+                <a:solidFill>
+                  <a:srgbClr val="5C6E6A"/>
+                </a:solidFill>
+              </a:rPr>
+              <a:t>   验收口径：</a:t>
+            </a:r>
+            <a:r>
+              <a:rPr sz="850" b="0">
+                <a:solidFill>
+                  <a:srgbClr val="5C6E6A"/>
+                </a:solidFill>
+              </a:rPr>
+              <a:t>优秀+GitHub Actions CI或pre-commit钩子</a:t>
+            </a:r>
+          </a:p>
+        </p:txBody>
+      </p:sp>
+      <p:sp>
+        <p:nvSpPr>
+          <p:cNvPr id="40" name="Rounded Rectangle 39"/>
+          <p:cNvSpPr/>
+          <p:nvPr/>
+        </p:nvSpPr>
+        <p:spPr>
+          <a:xfrm>
+            <a:off x="10532681" y="4701838"/>
+            <a:ext cx="1052766" cy="237744"/>
+          </a:xfrm>
+          <a:prstGeom prst="roundRect">
+            <a:avLst>
+              <a:gd name="adj" fmla="val 50000"/>
+            </a:avLst>
+          </a:prstGeom>
+          <a:solidFill>
+            <a:srgbClr val="C9A227"/>
+          </a:solidFill>
+          <a:ln>
+            <a:noFill/>
+          </a:ln>
+          <a:effectLst/>
+        </p:spPr>
+        <p:style>
+          <a:lnRef idx="1">
+            <a:schemeClr val="accent1"/>
+          </a:lnRef>
+          <a:fillRef idx="3">
+            <a:schemeClr val="accent1"/>
+          </a:fillRef>
+          <a:effectRef idx="2">
+            <a:schemeClr val="accent1"/>
+          </a:effectRef>
+          <a:fontRef idx="minor">
+            <a:schemeClr val="lt1"/>
+          </a:fontRef>
+        </p:style>
+        <p:txBody>
+          <a:bodyPr rtlCol="0" anchor="ctr"/>
+          <a:lstStyle/>
+          <a:p>
+            <a:pPr algn="ctr"/>
+          </a:p>
+        </p:txBody>
+      </p:sp>
+      <p:sp>
+        <p:nvSpPr>
+          <p:cNvPr id="41" name="TextBox 40"/>
+          <p:cNvSpPr txBox="1"/>
+          <p:nvPr/>
+        </p:nvSpPr>
+        <p:spPr>
+          <a:xfrm>
+            <a:off x="10532681" y="4701838"/>
+            <a:ext cx="1052766" cy="237744"/>
+          </a:xfrm>
+          <a:prstGeom prst="rect">
+            <a:avLst/>
+          </a:prstGeom>
+          <a:noFill/>
+        </p:spPr>
+        <p:txBody>
+          <a:bodyPr wrap="square" anchor="ctr" lIns="0" rIns="0" tIns="0" bIns="0">
+            <a:spAutoFit/>
+          </a:bodyPr>
+          <a:lstStyle/>
+          <a:p>
+            <a:pPr algn="ctr">
+              <a:lnSpc>
+                <a:spcPct val="114000"/>
+              </a:lnSpc>
+            </a:pPr>
+            <a:r>
+              <a:rPr sz="850" b="1">
+                <a:solidFill>
+                  <a:srgbClr val="FFFFFF"/>
+                </a:solidFill>
+              </a:rPr>
+              <a:t>本节取证项 通过</a:t>
+            </a:r>
+          </a:p>
+        </p:txBody>
+      </p:sp>
+      <p:sp>
+        <p:nvSpPr>
+          <p:cNvPr id="42" name="TextBox 41"/>
+          <p:cNvSpPr txBox="1"/>
+          <p:nvPr/>
+        </p:nvSpPr>
+        <p:spPr>
+          <a:xfrm>
+            <a:off x="932688" y="4957870"/>
+            <a:ext cx="10671047" cy="400513"/>
+          </a:xfrm>
+          <a:prstGeom prst="rect">
+            <a:avLst/>
+          </a:prstGeom>
+          <a:noFill/>
+        </p:spPr>
+        <p:txBody>
+          <a:bodyPr wrap="square" anchor="t" lIns="0" rIns="0" tIns="0" bIns="0">
+            <a:spAutoFit/>
+          </a:bodyPr>
+          <a:lstStyle/>
+          <a:p>
+            <a:pPr algn="l">
+              <a:lnSpc>
+                <a:spcPct val="114000"/>
+              </a:lnSpc>
+            </a:pPr>
+            <a:r>
+              <a:rPr sz="950" b="0">
+                <a:solidFill>
+                  <a:srgbClr val="1B2B28"/>
+                </a:solidFill>
+              </a:rPr>
+              <a:t>pre-commit 钩子文件已产出=是（声明 2 个：black, flake8）｜.github/workflows 下 CI 文件 0 个｜工单优秀(B) 档前置=成立</a:t>
+            </a:r>
+          </a:p>
+        </p:txBody>
+      </p:sp>
+      <p:sp>
+        <p:nvSpPr>
+          <p:cNvPr id="43" name="Rounded Rectangle 42"/>
+          <p:cNvSpPr/>
+          <p:nvPr/>
+        </p:nvSpPr>
+        <p:spPr>
+          <a:xfrm>
+            <a:off x="475488" y="5477256"/>
+            <a:ext cx="11237976" cy="941831"/>
+          </a:xfrm>
+          <a:prstGeom prst="roundRect">
+            <a:avLst>
+              <a:gd name="adj" fmla="val 5000"/>
+            </a:avLst>
+          </a:prstGeom>
+          <a:solidFill>
+            <a:srgbClr val="E4F1EE"/>
+          </a:solidFill>
+          <a:ln>
+            <a:noFill/>
+          </a:ln>
+          <a:effectLst/>
+        </p:spPr>
+        <p:style>
+          <a:lnRef idx="1">
+            <a:schemeClr val="accent1"/>
+          </a:lnRef>
+          <a:fillRef idx="3">
+            <a:schemeClr val="accent1"/>
+          </a:fillRef>
+          <a:effectRef idx="2">
+            <a:schemeClr val="accent1"/>
+          </a:effectRef>
+          <a:fontRef idx="minor">
+            <a:schemeClr val="lt1"/>
+          </a:fontRef>
+        </p:style>
+        <p:txBody>
+          <a:bodyPr rtlCol="0" anchor="ctr"/>
+          <a:lstStyle/>
+          <a:p>
+            <a:pPr algn="ctr"/>
+          </a:p>
+        </p:txBody>
+      </p:sp>
+      <p:sp>
+        <p:nvSpPr>
+          <p:cNvPr id="44" name="Rounded Rectangle 43"/>
+          <p:cNvSpPr/>
+          <p:nvPr/>
+        </p:nvSpPr>
+        <p:spPr>
+          <a:xfrm>
+            <a:off x="475488" y="5477256"/>
+            <a:ext cx="54864" cy="941831"/>
+          </a:xfrm>
+          <a:prstGeom prst="roundRect">
+            <a:avLst>
+              <a:gd name="adj" fmla="val 50000"/>
+            </a:avLst>
+          </a:prstGeom>
+          <a:solidFill>
+            <a:srgbClr val="C9A227"/>
+          </a:solidFill>
+          <a:ln>
+            <a:noFill/>
+          </a:ln>
+          <a:effectLst/>
+        </p:spPr>
+        <p:style>
+          <a:lnRef idx="1">
+            <a:schemeClr val="accent1"/>
+          </a:lnRef>
+          <a:fillRef idx="3">
+            <a:schemeClr val="accent1"/>
+          </a:fillRef>
+          <a:effectRef idx="2">
+            <a:schemeClr val="accent1"/>
+          </a:effectRef>
+          <a:fontRef idx="minor">
+            <a:schemeClr val="lt1"/>
+          </a:fontRef>
+        </p:style>
+        <p:txBody>
+          <a:bodyPr rtlCol="0" anchor="ctr"/>
+          <a:lstStyle/>
+          <a:p>
+            <a:pPr algn="ctr"/>
+          </a:p>
+        </p:txBody>
+      </p:sp>
+      <p:sp>
+        <p:nvSpPr>
+          <p:cNvPr id="45" name="TextBox 44"/>
+          <p:cNvSpPr txBox="1"/>
+          <p:nvPr/>
+        </p:nvSpPr>
+        <p:spPr>
+          <a:xfrm>
+            <a:off x="676656" y="5550408"/>
+            <a:ext cx="10908792" cy="795527"/>
+          </a:xfrm>
+          <a:prstGeom prst="rect">
+            <a:avLst/>
+          </a:prstGeom>
+          <a:noFill/>
+        </p:spPr>
+        <p:txBody>
+          <a:bodyPr wrap="square" anchor="t" lIns="0" rIns="0" tIns="0" bIns="0">
+            <a:spAutoFit/>
+          </a:bodyPr>
+          <a:lstStyle/>
+          <a:p>
+            <a:pPr algn="l">
+              <a:lnSpc>
+                <a:spcPct val="124000"/>
+              </a:lnSpc>
+            </a:pPr>
+            <a:r>
+              <a:rPr sz="850" b="0">
+                <a:solidFill>
+                  <a:srgbClr val="1B2B28"/>
+                </a:solidFill>
+              </a:rPr>
+              <a:t>出处：工程化项目/p12_proj_template/output/report.txt 第 37 节「工单验收四档对照」——本机 2026-10-28 05:06 实跑落盘，上表数字逐字摘录、未改写。</a:t>
+            </a:r>
+          </a:p>
+          <a:p>
+            <a:pPr algn="l">
+              <a:lnSpc>
+                <a:spcPct val="124000"/>
+              </a:lnSpc>
+            </a:pPr>
+            <a:r>
+              <a:rPr sz="850" b="0">
+                <a:solidFill>
+                  <a:srgbClr val="1B2B28"/>
+                </a:solidFill>
+              </a:rPr>
+              <a:t>复现：cd 工程化项目/p12_proj_template &amp;&amp; python run.py &amp;&amp; python -m pytest -q -o addopts=''</a:t>
+            </a:r>
+          </a:p>
+          <a:p>
+            <a:pPr algn="l">
+              <a:lnSpc>
+                <a:spcPct val="124000"/>
+              </a:lnSpc>
+            </a:pPr>
+            <a:r>
+              <a:rPr sz="850" b="0">
+                <a:solidFill>
+                  <a:srgbClr val="1B2B28"/>
+                </a:solidFill>
+              </a:rPr>
+              <a:t>口径：表中「判定」沿用报告原词——绿=达标/通过，黄=仅本节取证项通过（未取证子项在报告里逐条点名），红=未达标。</a:t>
+            </a:r>
+          </a:p>
+        </p:txBody>
+      </p:sp>
+    </p:spTree>
+  </p:cSld>
+  <p:clrMapOvr>
+    <a:masterClrMapping/>
+  </p:clrMapOvr>
+</p:sld>
+</file>
+
+<file path=ppt/slides/slide64.xml><?xml version="1.0" encoding="utf-8"?>
+<p:sld xmlns:a="http://schemas.openxmlformats.org/drawingml/2006/main" xmlns:p="http://schemas.openxmlformats.org/presentationml/2006/main" xmlns:r="http://schemas.openxmlformats.org/officeDocument/2006/relationships">
+  <p:cSld>
+    <p:spTree>
+      <p:nvGrpSpPr>
+        <p:cNvPr id="1" name=""/>
+        <p:cNvGrpSpPr/>
+        <p:nvPr/>
+      </p:nvGrpSpPr>
+      <p:grpSpPr/>
+      <p:sp>
+        <p:nvSpPr>
+          <p:cNvPr id="2" name="Rounded Rectangle 1"/>
+          <p:cNvSpPr/>
+          <p:nvPr/>
+        </p:nvSpPr>
+        <p:spPr>
+          <a:xfrm>
+            <a:off x="0" y="0"/>
+            <a:ext cx="12191695" cy="64008"/>
+          </a:xfrm>
+          <a:prstGeom prst="roundRect">
+            <a:avLst>
+              <a:gd name="adj" fmla="val 50000"/>
+            </a:avLst>
+          </a:prstGeom>
+          <a:solidFill>
+            <a:srgbClr val="0B5E54"/>
+          </a:solidFill>
+          <a:ln>
+            <a:noFill/>
+          </a:ln>
+          <a:effectLst/>
+        </p:spPr>
+        <p:style>
+          <a:lnRef idx="1">
+            <a:schemeClr val="accent1"/>
+          </a:lnRef>
+          <a:fillRef idx="3">
+            <a:schemeClr val="accent1"/>
+          </a:fillRef>
+          <a:effectRef idx="2">
+            <a:schemeClr val="accent1"/>
+          </a:effectRef>
+          <a:fontRef idx="minor">
+            <a:schemeClr val="lt1"/>
+          </a:fontRef>
+        </p:style>
+        <p:txBody>
+          <a:bodyPr rtlCol="0" anchor="ctr"/>
+          <a:lstStyle/>
+          <a:p>
+            <a:pPr algn="ctr"/>
+          </a:p>
+        </p:txBody>
+      </p:sp>
+      <p:sp>
+        <p:nvSpPr>
+          <p:cNvPr id="3" name="TextBox 2"/>
+          <p:cNvSpPr txBox="1"/>
+          <p:nvPr/>
+        </p:nvSpPr>
+        <p:spPr>
+          <a:xfrm>
+            <a:off x="475488" y="146304"/>
+            <a:ext cx="8229600" cy="292608"/>
+          </a:xfrm>
+          <a:prstGeom prst="rect">
+            <a:avLst/>
+          </a:prstGeom>
+          <a:noFill/>
+        </p:spPr>
+        <p:txBody>
+          <a:bodyPr wrap="square" anchor="t" lIns="0" rIns="0" tIns="0" bIns="0">
+            <a:spAutoFit/>
+          </a:bodyPr>
+          <a:lstStyle/>
+          <a:p>
+            <a:pPr algn="l">
+              <a:lnSpc>
+                <a:spcPct val="114000"/>
+              </a:lnSpc>
+            </a:pPr>
+            <a:r>
+              <a:rPr sz="1100" b="1">
+                <a:solidFill>
+                  <a:srgbClr val="0B5E54"/>
+                </a:solidFill>
+              </a:rPr>
+              <a:t>工单实战 · 运行留证</a:t>
+            </a:r>
+          </a:p>
+        </p:txBody>
+      </p:sp>
+      <p:sp>
+        <p:nvSpPr>
+          <p:cNvPr id="4" name="Rounded Rectangle 3"/>
+          <p:cNvSpPr/>
+          <p:nvPr/>
+        </p:nvSpPr>
+        <p:spPr>
+          <a:xfrm>
+            <a:off x="475488" y="475488"/>
+            <a:ext cx="2027872" cy="310896"/>
+          </a:xfrm>
+          <a:prstGeom prst="roundRect">
+            <a:avLst>
+              <a:gd name="adj" fmla="val 50000"/>
+            </a:avLst>
+          </a:prstGeom>
+          <a:solidFill>
+            <a:srgbClr val="C9A227"/>
+          </a:solidFill>
+          <a:ln>
+            <a:noFill/>
+          </a:ln>
+          <a:effectLst/>
+        </p:spPr>
+        <p:style>
+          <a:lnRef idx="1">
+            <a:schemeClr val="accent1"/>
+          </a:lnRef>
+          <a:fillRef idx="3">
+            <a:schemeClr val="accent1"/>
+          </a:fillRef>
+          <a:effectRef idx="2">
+            <a:schemeClr val="accent1"/>
+          </a:effectRef>
+          <a:fontRef idx="minor">
+            <a:schemeClr val="lt1"/>
+          </a:fontRef>
+        </p:style>
+        <p:txBody>
+          <a:bodyPr rtlCol="0" anchor="ctr"/>
+          <a:lstStyle/>
+          <a:p>
+            <a:pPr algn="ctr"/>
+          </a:p>
+        </p:txBody>
+      </p:sp>
+      <p:sp>
+        <p:nvSpPr>
+          <p:cNvPr id="5" name="TextBox 4"/>
+          <p:cNvSpPr txBox="1"/>
+          <p:nvPr/>
+        </p:nvSpPr>
+        <p:spPr>
+          <a:xfrm>
+            <a:off x="475488" y="475488"/>
+            <a:ext cx="2027872" cy="310896"/>
+          </a:xfrm>
+          <a:prstGeom prst="rect">
+            <a:avLst/>
+          </a:prstGeom>
+          <a:noFill/>
+        </p:spPr>
+        <p:txBody>
+          <a:bodyPr wrap="square" anchor="ctr" lIns="0" rIns="0" tIns="0" bIns="0">
+            <a:spAutoFit/>
+          </a:bodyPr>
+          <a:lstStyle/>
+          <a:p>
+            <a:pPr algn="ctr">
+              <a:lnSpc>
+                <a:spcPct val="114000"/>
+              </a:lnSpc>
+            </a:pPr>
+            <a:r>
+              <a:rPr sz="1050" b="1">
+                <a:solidFill>
+                  <a:srgbClr val="FFFFFF"/>
+                </a:solidFill>
+              </a:rPr>
+              <a:t>SCREENSHOT · 终端逐字截图</a:t>
+            </a:r>
+          </a:p>
+        </p:txBody>
+      </p:sp>
+      <p:sp>
+        <p:nvSpPr>
+          <p:cNvPr id="6" name="TextBox 5"/>
+          <p:cNvSpPr txBox="1"/>
+          <p:nvPr/>
+        </p:nvSpPr>
+        <p:spPr>
+          <a:xfrm>
+            <a:off x="475488" y="859536"/>
+            <a:ext cx="11237976" cy="502920"/>
+          </a:xfrm>
+          <a:prstGeom prst="rect">
+            <a:avLst/>
+          </a:prstGeom>
+          <a:noFill/>
+        </p:spPr>
+        <p:txBody>
+          <a:bodyPr wrap="square" anchor="t" lIns="0" rIns="0" tIns="0" bIns="0">
+            <a:spAutoFit/>
+          </a:bodyPr>
+          <a:lstStyle/>
+          <a:p>
+            <a:pPr algn="l">
+              <a:lnSpc>
+                <a:spcPct val="114000"/>
+              </a:lnSpc>
+            </a:pPr>
+            <a:r>
+              <a:rPr sz="2200" b="1">
+                <a:solidFill>
+                  <a:srgbClr val="1B2B28"/>
+                </a:solidFill>
+              </a:rPr>
+              <a:t>P1.2 工单验收四档对照 · 四档逐字输出截图</a:t>
+            </a:r>
+          </a:p>
+        </p:txBody>
+      </p:sp>
+      <p:sp>
+        <p:nvSpPr>
+          <p:cNvPr id="7" name="Rounded Rectangle 6"/>
+          <p:cNvSpPr/>
+          <p:nvPr/>
+        </p:nvSpPr>
+        <p:spPr>
+          <a:xfrm>
+            <a:off x="475488" y="1389888"/>
+            <a:ext cx="1234440" cy="27432"/>
+          </a:xfrm>
+          <a:prstGeom prst="roundRect">
+            <a:avLst>
+              <a:gd name="adj" fmla="val 50000"/>
+            </a:avLst>
+          </a:prstGeom>
+          <a:solidFill>
+            <a:srgbClr val="C9A227"/>
+          </a:solidFill>
+          <a:ln>
+            <a:noFill/>
+          </a:ln>
+          <a:effectLst/>
+        </p:spPr>
+        <p:style>
+          <a:lnRef idx="1">
+            <a:schemeClr val="accent1"/>
+          </a:lnRef>
+          <a:fillRef idx="3">
+            <a:schemeClr val="accent1"/>
+          </a:fillRef>
+          <a:effectRef idx="2">
+            <a:schemeClr val="accent1"/>
+          </a:effectRef>
+          <a:fontRef idx="minor">
+            <a:schemeClr val="lt1"/>
+          </a:fontRef>
+        </p:style>
+        <p:txBody>
+          <a:bodyPr rtlCol="0" anchor="ctr"/>
+          <a:lstStyle/>
+          <a:p>
+            <a:pPr algn="ctr"/>
+          </a:p>
+        </p:txBody>
+      </p:sp>
+      <p:sp>
+        <p:nvSpPr>
+          <p:cNvPr id="8" name="Rounded Rectangle 7"/>
+          <p:cNvSpPr/>
+          <p:nvPr/>
+        </p:nvSpPr>
+        <p:spPr>
+          <a:xfrm>
+            <a:off x="475488" y="6419088"/>
+            <a:ext cx="11237976" cy="10972"/>
+          </a:xfrm>
+          <a:prstGeom prst="roundRect">
+            <a:avLst>
+              <a:gd name="adj" fmla="val 50000"/>
+            </a:avLst>
+          </a:prstGeom>
+          <a:solidFill>
+            <a:srgbClr val="E4F1EE"/>
+          </a:solidFill>
+          <a:ln>
+            <a:noFill/>
+          </a:ln>
+          <a:effectLst/>
+        </p:spPr>
+        <p:style>
+          <a:lnRef idx="1">
+            <a:schemeClr val="accent1"/>
+          </a:lnRef>
+          <a:fillRef idx="3">
+            <a:schemeClr val="accent1"/>
+          </a:fillRef>
+          <a:effectRef idx="2">
+            <a:schemeClr val="accent1"/>
+          </a:effectRef>
+          <a:fontRef idx="minor">
+            <a:schemeClr val="lt1"/>
+          </a:fontRef>
+        </p:style>
+        <p:txBody>
+          <a:bodyPr rtlCol="0" anchor="ctr"/>
+          <a:lstStyle/>
+          <a:p>
+            <a:pPr algn="ctr"/>
+          </a:p>
+        </p:txBody>
+      </p:sp>
+      <p:sp>
+        <p:nvSpPr>
+          <p:cNvPr id="9" name="TextBox 8"/>
+          <p:cNvSpPr txBox="1"/>
+          <p:nvPr/>
+        </p:nvSpPr>
+        <p:spPr>
+          <a:xfrm>
+            <a:off x="475488" y="6455664"/>
+            <a:ext cx="7315200" cy="292608"/>
+          </a:xfrm>
+          <a:prstGeom prst="rect">
+            <a:avLst/>
+          </a:prstGeom>
+          <a:noFill/>
+        </p:spPr>
+        <p:txBody>
+          <a:bodyPr wrap="square" anchor="t" lIns="0" rIns="0" tIns="0" bIns="0">
+            <a:spAutoFit/>
+          </a:bodyPr>
+          <a:lstStyle/>
+          <a:p>
+            <a:pPr algn="l">
+              <a:lnSpc>
+                <a:spcPct val="114000"/>
+              </a:lnSpc>
+            </a:pPr>
+            <a:r>
+              <a:rPr sz="900" b="0">
+                <a:solidFill>
+                  <a:srgbClr val="5C6E6A"/>
+                </a:solidFill>
+              </a:rPr>
+              <a:t>两江智造集团 · Python程序设计（项目实战）</a:t>
+            </a:r>
+          </a:p>
+        </p:txBody>
+      </p:sp>
+      <p:sp>
+        <p:nvSpPr>
+          <p:cNvPr id="10" name="TextBox 9"/>
+          <p:cNvSpPr txBox="1"/>
+          <p:nvPr/>
+        </p:nvSpPr>
+        <p:spPr>
+          <a:xfrm>
+            <a:off x="10597896" y="6537960"/>
+            <a:ext cx="996696" cy="301752"/>
+          </a:xfrm>
+          <a:prstGeom prst="rect">
+            <a:avLst/>
+          </a:prstGeom>
+          <a:noFill/>
+        </p:spPr>
+        <p:txBody>
+          <a:bodyPr wrap="square" anchor="t" lIns="0" rIns="0" tIns="0" bIns="0">
+            <a:spAutoFit/>
+          </a:bodyPr>
+          <a:lstStyle/>
+          <a:p>
+            <a:pPr algn="r">
+              <a:lnSpc>
+                <a:spcPct val="114000"/>
+              </a:lnSpc>
+            </a:pPr>
+            <a:r>
+              <a:rPr sz="1000" b="0">
+                <a:solidFill>
+                  <a:srgbClr val="8A97B5"/>
+                </a:solidFill>
+              </a:rPr>
+              <a:t>48 / 65</a:t>
+            </a:r>
+          </a:p>
+        </p:txBody>
+      </p:sp>
+      <p:sp>
+        <p:nvSpPr>
+          <p:cNvPr id="11" name="TextBox 10"/>
+          <p:cNvSpPr txBox="1"/>
+          <p:nvPr/>
+        </p:nvSpPr>
+        <p:spPr>
+          <a:xfrm>
+            <a:off x="475488" y="1517904"/>
+            <a:ext cx="11237976" cy="237744"/>
+          </a:xfrm>
+          <a:prstGeom prst="rect">
+            <a:avLst/>
+          </a:prstGeom>
+          <a:noFill/>
+        </p:spPr>
+        <p:txBody>
+          <a:bodyPr wrap="square" anchor="t" lIns="0" rIns="0" tIns="0" bIns="0">
+            <a:spAutoFit/>
+          </a:bodyPr>
+          <a:lstStyle/>
+          <a:p>
+            <a:pPr algn="l">
+              <a:lnSpc>
+                <a:spcPct val="114000"/>
+              </a:lnSpc>
+            </a:pPr>
+            <a:r>
+              <a:rPr sz="1000" b="0">
+                <a:solidFill>
+                  <a:srgbClr val="5C6E6A"/>
+                </a:solidFill>
+              </a:rPr>
+              <a:t>终端窗口截图：由 report.txt 本节逐字渲染，未手工改写</a:t>
+            </a:r>
+          </a:p>
+        </p:txBody>
+      </p:sp>
+      <p:pic>
+        <p:nvPicPr>
+          <p:cNvPr id="12" name="Picture 11" descr="p12_proj_template_workorder.png"/>
+          <p:cNvPicPr>
+            <a:picLocks noChangeAspect="1"/>
+          </p:cNvPicPr>
+          <p:nvPr/>
+        </p:nvPicPr>
+        <p:blipFill>
+          <a:blip r:embed="rId2"/>
+          <a:stretch>
+            <a:fillRect/>
+          </a:stretch>
+        </p:blipFill>
+        <p:spPr>
+          <a:xfrm>
+            <a:off x="475488" y="1823437"/>
+            <a:ext cx="11237976" cy="3787198"/>
+          </a:xfrm>
+          <a:prstGeom prst="rect">
+            <a:avLst/>
+          </a:prstGeom>
+        </p:spPr>
+      </p:pic>
+      <p:sp>
+        <p:nvSpPr>
+          <p:cNvPr id="13" name="TextBox 12"/>
+          <p:cNvSpPr txBox="1"/>
+          <p:nvPr/>
+        </p:nvSpPr>
+        <p:spPr>
+          <a:xfrm>
+            <a:off x="475488" y="5647210"/>
+            <a:ext cx="11237976" cy="256032"/>
+          </a:xfrm>
+          <a:prstGeom prst="rect">
+            <a:avLst/>
+          </a:prstGeom>
+          <a:noFill/>
+        </p:spPr>
+        <p:txBody>
+          <a:bodyPr wrap="square" anchor="t" lIns="0" rIns="0" tIns="0" bIns="0">
+            <a:spAutoFit/>
+          </a:bodyPr>
+          <a:lstStyle/>
+          <a:p>
+            <a:pPr algn="l">
+              <a:lnSpc>
+                <a:spcPct val="114000"/>
+              </a:lnSpc>
+            </a:pPr>
+            <a:r>
+              <a:rPr sz="850" b="0">
+                <a:solidFill>
+                  <a:srgbClr val="5C6E6A"/>
+                </a:solidFill>
+              </a:rPr>
+              <a:t>▲ p12_proj_template：工单验收四档对照 第 37 行起的四档逐字原文（绿=达标/通过，黄=仅本节取证项，橙=未实测项）</a:t>
+            </a:r>
+          </a:p>
+        </p:txBody>
+      </p:sp>
+    </p:spTree>
+  </p:cSld>
+  <p:clrMapOvr>
+    <a:masterClrMapping/>
+  </p:clrMapOvr>
+</p:sld>
+</file>
+
+<file path=ppt/slides/slide65.xml><?xml version="1.0" encoding="utf-8"?>
+<p:sld xmlns:a="http://schemas.openxmlformats.org/drawingml/2006/main" xmlns:p="http://schemas.openxmlformats.org/presentationml/2006/main" xmlns:r="http://schemas.openxmlformats.org/officeDocument/2006/relationships">
+  <p:cSld>
+    <p:spTree>
+      <p:nvGrpSpPr>
+        <p:cNvPr id="1" name=""/>
+        <p:cNvGrpSpPr/>
+        <p:nvPr/>
+      </p:nvGrpSpPr>
+      <p:grpSpPr/>
+      <p:sp>
+        <p:nvSpPr>
+          <p:cNvPr id="2" name="Rounded Rectangle 1"/>
+          <p:cNvSpPr/>
+          <p:nvPr/>
+        </p:nvSpPr>
+        <p:spPr>
+          <a:xfrm>
+            <a:off x="0" y="0"/>
+            <a:ext cx="12191695" cy="64008"/>
+          </a:xfrm>
+          <a:prstGeom prst="roundRect">
+            <a:avLst>
+              <a:gd name="adj" fmla="val 50000"/>
+            </a:avLst>
+          </a:prstGeom>
+          <a:solidFill>
+            <a:srgbClr val="0B5E54"/>
+          </a:solidFill>
+          <a:ln>
+            <a:noFill/>
+          </a:ln>
+          <a:effectLst/>
+        </p:spPr>
+        <p:style>
+          <a:lnRef idx="1">
+            <a:schemeClr val="accent1"/>
+          </a:lnRef>
+          <a:fillRef idx="3">
+            <a:schemeClr val="accent1"/>
+          </a:fillRef>
+          <a:effectRef idx="2">
+            <a:schemeClr val="accent1"/>
+          </a:effectRef>
+          <a:fontRef idx="minor">
+            <a:schemeClr val="lt1"/>
+          </a:fontRef>
+        </p:style>
+        <p:txBody>
+          <a:bodyPr rtlCol="0" anchor="ctr"/>
+          <a:lstStyle/>
+          <a:p>
+            <a:pPr algn="ctr"/>
+          </a:p>
+        </p:txBody>
+      </p:sp>
+      <p:sp>
+        <p:nvSpPr>
+          <p:cNvPr id="3" name="TextBox 2"/>
+          <p:cNvSpPr txBox="1"/>
+          <p:nvPr/>
+        </p:nvSpPr>
+        <p:spPr>
+          <a:xfrm>
+            <a:off x="475488" y="146304"/>
+            <a:ext cx="8229600" cy="292608"/>
+          </a:xfrm>
+          <a:prstGeom prst="rect">
+            <a:avLst/>
+          </a:prstGeom>
+          <a:noFill/>
+        </p:spPr>
+        <p:txBody>
+          <a:bodyPr wrap="square" anchor="t" lIns="0" rIns="0" tIns="0" bIns="0">
+            <a:spAutoFit/>
+          </a:bodyPr>
+          <a:lstStyle/>
+          <a:p>
+            <a:pPr algn="l">
+              <a:lnSpc>
+                <a:spcPct val="114000"/>
+              </a:lnSpc>
+            </a:pPr>
+            <a:r>
+              <a:rPr sz="1100" b="1">
+                <a:solidFill>
+                  <a:srgbClr val="0B5E54"/>
+                </a:solidFill>
+              </a:rPr>
+              <a:t>工单实战 · 运行留证</a:t>
+            </a:r>
+          </a:p>
+        </p:txBody>
+      </p:sp>
+      <p:sp>
+        <p:nvSpPr>
+          <p:cNvPr id="4" name="Rounded Rectangle 3"/>
+          <p:cNvSpPr/>
+          <p:nvPr/>
+        </p:nvSpPr>
+        <p:spPr>
+          <a:xfrm>
+            <a:off x="475488" y="475488"/>
+            <a:ext cx="2027872" cy="310896"/>
+          </a:xfrm>
+          <a:prstGeom prst="roundRect">
+            <a:avLst>
+              <a:gd name="adj" fmla="val 50000"/>
+            </a:avLst>
+          </a:prstGeom>
+          <a:solidFill>
+            <a:srgbClr val="C9A227"/>
+          </a:solidFill>
+          <a:ln>
+            <a:noFill/>
+          </a:ln>
+          <a:effectLst/>
+        </p:spPr>
+        <p:style>
+          <a:lnRef idx="1">
+            <a:schemeClr val="accent1"/>
+          </a:lnRef>
+          <a:fillRef idx="3">
+            <a:schemeClr val="accent1"/>
+          </a:fillRef>
+          <a:effectRef idx="2">
+            <a:schemeClr val="accent1"/>
+          </a:effectRef>
+          <a:fontRef idx="minor">
+            <a:schemeClr val="lt1"/>
+          </a:fontRef>
+        </p:style>
+        <p:txBody>
+          <a:bodyPr rtlCol="0" anchor="ctr"/>
+          <a:lstStyle/>
+          <a:p>
+            <a:pPr algn="ctr"/>
+          </a:p>
+        </p:txBody>
+      </p:sp>
+      <p:sp>
+        <p:nvSpPr>
+          <p:cNvPr id="5" name="TextBox 4"/>
+          <p:cNvSpPr txBox="1"/>
+          <p:nvPr/>
+        </p:nvSpPr>
+        <p:spPr>
+          <a:xfrm>
+            <a:off x="475488" y="475488"/>
+            <a:ext cx="2027872" cy="310896"/>
+          </a:xfrm>
+          <a:prstGeom prst="rect">
+            <a:avLst/>
+          </a:prstGeom>
+          <a:noFill/>
+        </p:spPr>
+        <p:txBody>
+          <a:bodyPr wrap="square" anchor="ctr" lIns="0" rIns="0" tIns="0" bIns="0">
+            <a:spAutoFit/>
+          </a:bodyPr>
+          <a:lstStyle/>
+          <a:p>
+            <a:pPr algn="ctr">
+              <a:lnSpc>
+                <a:spcPct val="114000"/>
+              </a:lnSpc>
+            </a:pPr>
+            <a:r>
+              <a:rPr sz="1050" b="1">
+                <a:solidFill>
+                  <a:srgbClr val="FFFFFF"/>
+                </a:solidFill>
+              </a:rPr>
+              <a:t>SCREENSHOT · 终端逐字截图</a:t>
+            </a:r>
+          </a:p>
+        </p:txBody>
+      </p:sp>
+      <p:sp>
+        <p:nvSpPr>
+          <p:cNvPr id="6" name="TextBox 5"/>
+          <p:cNvSpPr txBox="1"/>
+          <p:nvPr/>
+        </p:nvSpPr>
+        <p:spPr>
+          <a:xfrm>
+            <a:off x="475488" y="859536"/>
+            <a:ext cx="11237976" cy="502920"/>
+          </a:xfrm>
+          <a:prstGeom prst="rect">
+            <a:avLst/>
+          </a:prstGeom>
+          <a:noFill/>
+        </p:spPr>
+        <p:txBody>
+          <a:bodyPr wrap="square" anchor="t" lIns="0" rIns="0" tIns="0" bIns="0">
+            <a:spAutoFit/>
+          </a:bodyPr>
+          <a:lstStyle/>
+          <a:p>
+            <a:pPr algn="l">
+              <a:lnSpc>
+                <a:spcPct val="114000"/>
+              </a:lnSpc>
+            </a:pPr>
+            <a:r>
+              <a:rPr sz="2200" b="1">
+                <a:solidFill>
+                  <a:srgbClr val="1B2B28"/>
+                </a:solidFill>
+              </a:rPr>
+              <a:t>P1.2 · 另一套阶梯逐字输出＋pytest 全量实跑</a:t>
+            </a:r>
+          </a:p>
+        </p:txBody>
+      </p:sp>
+      <p:sp>
+        <p:nvSpPr>
+          <p:cNvPr id="7" name="Rounded Rectangle 6"/>
+          <p:cNvSpPr/>
+          <p:nvPr/>
+        </p:nvSpPr>
+        <p:spPr>
+          <a:xfrm>
+            <a:off x="475488" y="1389888"/>
+            <a:ext cx="1234440" cy="27432"/>
+          </a:xfrm>
+          <a:prstGeom prst="roundRect">
+            <a:avLst>
+              <a:gd name="adj" fmla="val 50000"/>
+            </a:avLst>
+          </a:prstGeom>
+          <a:solidFill>
+            <a:srgbClr val="C9A227"/>
+          </a:solidFill>
+          <a:ln>
+            <a:noFill/>
+          </a:ln>
+          <a:effectLst/>
+        </p:spPr>
+        <p:style>
+          <a:lnRef idx="1">
+            <a:schemeClr val="accent1"/>
+          </a:lnRef>
+          <a:fillRef idx="3">
+            <a:schemeClr val="accent1"/>
+          </a:fillRef>
+          <a:effectRef idx="2">
+            <a:schemeClr val="accent1"/>
+          </a:effectRef>
+          <a:fontRef idx="minor">
+            <a:schemeClr val="lt1"/>
+          </a:fontRef>
+        </p:style>
+        <p:txBody>
+          <a:bodyPr rtlCol="0" anchor="ctr"/>
+          <a:lstStyle/>
+          <a:p>
+            <a:pPr algn="ctr"/>
+          </a:p>
+        </p:txBody>
+      </p:sp>
+      <p:sp>
+        <p:nvSpPr>
+          <p:cNvPr id="8" name="Rounded Rectangle 7"/>
+          <p:cNvSpPr/>
+          <p:nvPr/>
+        </p:nvSpPr>
+        <p:spPr>
+          <a:xfrm>
+            <a:off x="475488" y="6419088"/>
+            <a:ext cx="11237976" cy="10972"/>
+          </a:xfrm>
+          <a:prstGeom prst="roundRect">
+            <a:avLst>
+              <a:gd name="adj" fmla="val 50000"/>
+            </a:avLst>
+          </a:prstGeom>
+          <a:solidFill>
+            <a:srgbClr val="E4F1EE"/>
+          </a:solidFill>
+          <a:ln>
+            <a:noFill/>
+          </a:ln>
+          <a:effectLst/>
+        </p:spPr>
+        <p:style>
+          <a:lnRef idx="1">
+            <a:schemeClr val="accent1"/>
+          </a:lnRef>
+          <a:fillRef idx="3">
+            <a:schemeClr val="accent1"/>
+          </a:fillRef>
+          <a:effectRef idx="2">
+            <a:schemeClr val="accent1"/>
+          </a:effectRef>
+          <a:fontRef idx="minor">
+            <a:schemeClr val="lt1"/>
+          </a:fontRef>
+        </p:style>
+        <p:txBody>
+          <a:bodyPr rtlCol="0" anchor="ctr"/>
+          <a:lstStyle/>
+          <a:p>
+            <a:pPr algn="ctr"/>
+          </a:p>
+        </p:txBody>
+      </p:sp>
+      <p:sp>
+        <p:nvSpPr>
+          <p:cNvPr id="9" name="TextBox 8"/>
+          <p:cNvSpPr txBox="1"/>
+          <p:nvPr/>
+        </p:nvSpPr>
+        <p:spPr>
+          <a:xfrm>
+            <a:off x="475488" y="6455664"/>
+            <a:ext cx="7315200" cy="292608"/>
+          </a:xfrm>
+          <a:prstGeom prst="rect">
+            <a:avLst/>
+          </a:prstGeom>
+          <a:noFill/>
+        </p:spPr>
+        <p:txBody>
+          <a:bodyPr wrap="square" anchor="t" lIns="0" rIns="0" tIns="0" bIns="0">
+            <a:spAutoFit/>
+          </a:bodyPr>
+          <a:lstStyle/>
+          <a:p>
+            <a:pPr algn="l">
+              <a:lnSpc>
+                <a:spcPct val="114000"/>
+              </a:lnSpc>
+            </a:pPr>
+            <a:r>
+              <a:rPr sz="900" b="0">
+                <a:solidFill>
+                  <a:srgbClr val="5C6E6A"/>
+                </a:solidFill>
+              </a:rPr>
+              <a:t>两江智造集团 · Python程序设计（项目实战）</a:t>
+            </a:r>
+          </a:p>
+        </p:txBody>
+      </p:sp>
+      <p:sp>
+        <p:nvSpPr>
+          <p:cNvPr id="10" name="TextBox 9"/>
+          <p:cNvSpPr txBox="1"/>
+          <p:nvPr/>
+        </p:nvSpPr>
+        <p:spPr>
+          <a:xfrm>
+            <a:off x="10597896" y="6537960"/>
+            <a:ext cx="996696" cy="301752"/>
+          </a:xfrm>
+          <a:prstGeom prst="rect">
+            <a:avLst/>
+          </a:prstGeom>
+          <a:noFill/>
+        </p:spPr>
+        <p:txBody>
+          <a:bodyPr wrap="square" anchor="t" lIns="0" rIns="0" tIns="0" bIns="0">
+            <a:spAutoFit/>
+          </a:bodyPr>
+          <a:lstStyle/>
+          <a:p>
+            <a:pPr algn="r">
+              <a:lnSpc>
+                <a:spcPct val="114000"/>
+              </a:lnSpc>
+            </a:pPr>
+            <a:r>
+              <a:rPr sz="1000" b="0">
+                <a:solidFill>
+                  <a:srgbClr val="8A97B5"/>
+                </a:solidFill>
+              </a:rPr>
+              <a:t>49 / 65</a:t>
+            </a:r>
+          </a:p>
+        </p:txBody>
+      </p:sp>
+      <p:sp>
+        <p:nvSpPr>
+          <p:cNvPr id="11" name="TextBox 10"/>
+          <p:cNvSpPr txBox="1"/>
+          <p:nvPr/>
+        </p:nvSpPr>
+        <p:spPr>
+          <a:xfrm>
+            <a:off x="475488" y="1517904"/>
+            <a:ext cx="11237976" cy="237744"/>
+          </a:xfrm>
+          <a:prstGeom prst="rect">
+            <a:avLst/>
+          </a:prstGeom>
+          <a:noFill/>
+        </p:spPr>
+        <p:txBody>
+          <a:bodyPr wrap="square" anchor="t" lIns="0" rIns="0" tIns="0" bIns="0">
+            <a:spAutoFit/>
+          </a:bodyPr>
+          <a:lstStyle/>
+          <a:p>
+            <a:pPr algn="l">
+              <a:lnSpc>
+                <a:spcPct val="114000"/>
+              </a:lnSpc>
+            </a:pPr>
+            <a:r>
+              <a:rPr sz="1000" b="0">
+                <a:solidFill>
+                  <a:srgbClr val="5C6E6A"/>
+                </a:solidFill>
+              </a:rPr>
+              <a:t>上：p12_proj_template 分层达标逐字输出（见上一页）｜下：pytest 全量实跑（退出码 0，全绿）</a:t>
+            </a:r>
+          </a:p>
+        </p:txBody>
+      </p:sp>
+      <p:pic>
+        <p:nvPicPr>
+          <p:cNvPr id="12" name="Picture 11" descr="p12_proj_template_classroom.png"/>
+          <p:cNvPicPr>
+            <a:picLocks noChangeAspect="1"/>
+          </p:cNvPicPr>
+          <p:nvPr/>
+        </p:nvPicPr>
+        <p:blipFill>
+          <a:blip r:embed="rId2"/>
+          <a:stretch>
+            <a:fillRect/>
+          </a:stretch>
+        </p:blipFill>
+        <p:spPr>
+          <a:xfrm>
+            <a:off x="2197198" y="1792224"/>
+            <a:ext cx="7794555" cy="2314983"/>
+          </a:xfrm>
+          <a:prstGeom prst="rect">
+            <a:avLst/>
+          </a:prstGeom>
+        </p:spPr>
+      </p:pic>
+      <p:sp>
+        <p:nvSpPr>
+          <p:cNvPr id="13" name="TextBox 12"/>
+          <p:cNvSpPr txBox="1"/>
+          <p:nvPr/>
+        </p:nvSpPr>
+        <p:spPr>
+          <a:xfrm>
+            <a:off x="475488" y="4143782"/>
+            <a:ext cx="11237976" cy="256032"/>
+          </a:xfrm>
+          <a:prstGeom prst="rect">
+            <a:avLst/>
+          </a:prstGeom>
+          <a:noFill/>
+        </p:spPr>
+        <p:txBody>
+          <a:bodyPr wrap="square" anchor="t" lIns="0" rIns="0" tIns="0" bIns="0">
+            <a:spAutoFit/>
+          </a:bodyPr>
+          <a:lstStyle/>
+          <a:p>
+            <a:pPr algn="l">
+              <a:lnSpc>
+                <a:spcPct val="114000"/>
+              </a:lnSpc>
+            </a:pPr>
+            <a:r>
+              <a:rPr sz="850" b="0">
+                <a:solidFill>
+                  <a:srgbClr val="5C6E6A"/>
+                </a:solidFill>
+              </a:rPr>
+              <a:t>▲ 分层达标（第 49 行起）：四档逐字原文，未改写</a:t>
+            </a:r>
+          </a:p>
+        </p:txBody>
+      </p:sp>
+      <p:pic>
+        <p:nvPicPr>
+          <p:cNvPr id="14" name="Picture 13" descr="p12_proj_template_pytest.png"/>
+          <p:cNvPicPr>
+            <a:picLocks noChangeAspect="1"/>
+          </p:cNvPicPr>
+          <p:nvPr/>
+        </p:nvPicPr>
+        <p:blipFill>
+          <a:blip r:embed="rId3"/>
+          <a:stretch>
+            <a:fillRect/>
+          </a:stretch>
+        </p:blipFill>
+        <p:spPr>
+          <a:xfrm>
+            <a:off x="2197198" y="4418102"/>
+            <a:ext cx="7794555" cy="1223745"/>
+          </a:xfrm>
+          <a:prstGeom prst="rect">
+            <a:avLst/>
+          </a:prstGeom>
+        </p:spPr>
+      </p:pic>
+      <p:sp>
+        <p:nvSpPr>
+          <p:cNvPr id="15" name="TextBox 14"/>
+          <p:cNvSpPr txBox="1"/>
+          <p:nvPr/>
+        </p:nvSpPr>
+        <p:spPr>
+          <a:xfrm>
+            <a:off x="475488" y="5678424"/>
+            <a:ext cx="11237976" cy="256032"/>
+          </a:xfrm>
+          <a:prstGeom prst="rect">
+            <a:avLst/>
+          </a:prstGeom>
+          <a:noFill/>
+        </p:spPr>
+        <p:txBody>
+          <a:bodyPr wrap="square" anchor="t" lIns="0" rIns="0" tIns="0" bIns="0">
+            <a:spAutoFit/>
+          </a:bodyPr>
+          <a:lstStyle/>
+          <a:p>
+            <a:pPr algn="l">
+              <a:lnSpc>
+                <a:spcPct val="114000"/>
+              </a:lnSpc>
+            </a:pPr>
+            <a:r>
+              <a:rPr sz="850" b="0">
+                <a:solidFill>
+                  <a:srgbClr val="5C6E6A"/>
+                </a:solidFill>
+              </a:rPr>
+              <a:t>▲ pytest：81 passed in 1.30s（本机实跑，非示例）</a:t>
+            </a:r>
+          </a:p>
+        </p:txBody>
+      </p:sp>
+    </p:spTree>
+  </p:cSld>
+  <p:clrMapOvr>
+    <a:masterClrMapping/>
+  </p:clrMapOvr>
+</p:sld>
+</file>
+
 <file path=ppt/slides/slide7.xml><?xml version="1.0" encoding="utf-8"?>
 <p:sld xmlns:a="http://schemas.openxmlformats.org/drawingml/2006/main" xmlns:p="http://schemas.openxmlformats.org/presentationml/2006/main" xmlns:r="http://schemas.openxmlformats.org/officeDocument/2006/relationships">
   <p:cSld>
@@ -58859,7 +61876,7 @@
                 </a:solidFill>
                 <a:latin typeface="微软雅黑"/>
               </a:rPr>
-              <a:t>7 / 62</a:t>
+              <a:t>7 / 65</a:t>
             </a:r>
           </a:p>
         </p:txBody>
@@ -59714,7 +62731,7 @@
                 </a:solidFill>
                 <a:latin typeface="微软雅黑"/>
               </a:rPr>
-              <a:t>8 / 62</a:t>
+              <a:t>8 / 65</a:t>
             </a:r>
           </a:p>
         </p:txBody>
@@ -61316,7 +64333,7 @@
                 </a:solidFill>
                 <a:latin typeface="微软雅黑"/>
               </a:rPr>
-              <a:t>9 / 62</a:t>
+              <a:t>9 / 65</a:t>
             </a:r>
           </a:p>
         </p:txBody>
